--- a/Topic_D/Exam_Practice/TD-L03_Speaking_Workshop_Subjects_Timetables_and_Preferences.pptx
+++ b/Topic_D/Exam_Practice/TD-L03_Speaking_Workshop_Subjects_Timetables_and_Preferences.pptx
@@ -615,7 +615,11 @@
           <a:lstStyle/>
           <a:p>
             <a:r>
-              <a:rPr lang="en-US" dirty="0"/>
+              <a:rPr lang="ar-SA" dirty="0">
+                <a:latin typeface="Amiri" pitchFamily="2" charset="-78"/>
+                <a:ea typeface="Amiri" pitchFamily="2" charset="-78"/>
+                <a:cs typeface="Amiri" pitchFamily="2" charset="-78"/>
+              </a:rPr>
               <a:t>ROLE PLAY C (Develop) — a parents’ evening.
 SET-UP IN THE BREAKOUT ROOM: A = examiner (reads the left column ONLY — the questions, in order), B = candidate (sees the task column; Core may use the help column), C = observer (ticks the feedback checklist). 1 minute preparation, about 3 minutes speaking, 1 minute feedback, then rotate.
 Task ! is the unexpected question: in the exam the candidate has not seen it — the examiner should read it without warning.
@@ -707,7 +711,11 @@
           <a:lstStyle/>
           <a:p>
             <a:r>
-              <a:rPr lang="en-US" dirty="0"/>
+              <a:rPr lang="ar-SA" dirty="0">
+                <a:latin typeface="Amiri" pitchFamily="2" charset="-78"/>
+                <a:ea typeface="Amiri" pitchFamily="2" charset="-78"/>
+                <a:cs typeface="Amiri" pitchFamily="2" charset="-78"/>
+              </a:rPr>
               <a:t>ROLE PLAY D (Stretch) — a school-council debate.
 SET-UP IN THE BREAKOUT ROOM: A = examiner (reads the left column ONLY — the questions, in order), B = candidate (sees the task column; Core may use the help column), C = observer (ticks the feedback checklist). 1 minute preparation, about 3 minutes speaking, 1 minute feedback, then rotate.
 Task ! is the unexpected question: in the exam the candidate has not seen it — the examiner should read it without warning.
@@ -1243,7 +1251,11 @@
           <a:lstStyle/>
           <a:p>
             <a:r>
-              <a:rPr lang="en-US" dirty="0"/>
+              <a:rPr lang="ar-SA" dirty="0">
+                <a:latin typeface="Amiri" pitchFamily="2" charset="-78"/>
+                <a:ea typeface="Amiri" pitchFamily="2" charset="-78"/>
+                <a:cs typeface="Amiri" pitchFamily="2" charset="-78"/>
+              </a:rPr>
               <a:t>TOPIC CONVERSATION — Core. Examiner asks the questions in order and may add “لِمَاذَا؟ / هَلْ يُمْكِنُ أَنْ تَشْرَحَ أَكْثَرَ؟” to push for more. Candidate aims for one full sentence per question.
 </a:t>
             </a:r>
@@ -1332,7 +1344,11 @@
           <a:lstStyle/>
           <a:p>
             <a:r>
-              <a:rPr lang="en-US" dirty="0"/>
+              <a:rPr lang="ar-SA" dirty="0">
+                <a:latin typeface="Amiri" pitchFamily="2" charset="-78"/>
+                <a:ea typeface="Amiri" pitchFamily="2" charset="-78"/>
+                <a:cs typeface="Amiri" pitchFamily="2" charset="-78"/>
+              </a:rPr>
               <a:t>TOPIC CONVERSATION — Develop. Examiner asks the questions in order and may add “لِمَاذَا؟ / هَلْ يُمْكِنُ أَنْ تَشْرَحَ أَكْثَرَ؟” to push for more. Candidate aims for two or three sentences, with a comparison and a past detail.
 </a:t>
             </a:r>
@@ -1421,7 +1437,11 @@
           <a:lstStyle/>
           <a:p>
             <a:r>
-              <a:rPr lang="en-US" dirty="0"/>
+              <a:rPr lang="ar-SA" dirty="0">
+                <a:latin typeface="Amiri" pitchFamily="2" charset="-78"/>
+                <a:ea typeface="Amiri" pitchFamily="2" charset="-78"/>
+                <a:cs typeface="Amiri" pitchFamily="2" charset="-78"/>
+              </a:rPr>
               <a:t>TOPIC CONVERSATION — Stretch. Examiner asks the questions in order and may add “لِمَاذَا؟ / هَلْ يُمْكِنُ أَنْ تَشْرَحَ أَكْثَرَ؟” to push for more. Candidate aims for a developed answer: opinion, balance, concession and a conditional.
 </a:t>
             </a:r>
@@ -1510,7 +1530,11 @@
           <a:lstStyle/>
           <a:p>
             <a:r>
-              <a:rPr lang="en-US" dirty="0"/>
+              <a:rPr lang="ar-SA" dirty="0">
+                <a:latin typeface="Amiri" pitchFamily="2" charset="-78"/>
+                <a:ea typeface="Amiri" pitchFamily="2" charset="-78"/>
+                <a:cs typeface="Amiri" pitchFamily="2" charset="-78"/>
+              </a:rPr>
               <a:t>WELCOME (1 min) — while students join.
 • Greet each student by name as they arrive: السَّلَامُ عَلَيْكُمْ. Take the register (Pastoral Tracker: attendance 0/1).
 • 2-MINUTE CHECK-IN (SEND training): a private chat to any student who seemed unsettled last lesson — “Are you okay today? 👍 / 👎”.
@@ -2224,7 +2248,11 @@
           <a:lstStyle/>
           <a:p>
             <a:r>
-              <a:rPr lang="en-US" dirty="0"/>
+              <a:rPr lang="ar-SA" dirty="0">
+                <a:latin typeface="Amiri" pitchFamily="2" charset="-78"/>
+                <a:ea typeface="Amiri" pitchFamily="2" charset="-78"/>
+                <a:cs typeface="Amiri" pitchFamily="2" charset="-78"/>
+              </a:rPr>
               <a:t>TEACH (3 min). Role play = precise and complete; conversation = develop. Choral repetition of the repair phrases. To a girl: تُعِيدِي.</a:t>
             </a:r>
             <a:endParaRPr lang="en-US" dirty="0"/>
@@ -2312,7 +2340,11 @@
           <a:lstStyle/>
           <a:p>
             <a:r>
-              <a:rPr lang="en-US" dirty="0"/>
+              <a:rPr lang="ar-SA" dirty="0">
+                <a:latin typeface="Amiri" pitchFamily="2" charset="-78"/>
+                <a:ea typeface="Amiri" pitchFamily="2" charset="-78"/>
+                <a:cs typeface="Amiri" pitchFamily="2" charset="-78"/>
+              </a:rPr>
               <a:t>LANGUAGE BANK (2 min) — most subjects are feminine through مَادَّةٌ, but the adjective follows the subject’s own gender: الرِّيَاضِيَّاتُ صَعْبَةٌ (pl. → f.) · التَّارِيخُ مُمْتِعٌ (m.) · الكِيمْيَاءُ صَعْبَةٌ (f.).</a:t>
             </a:r>
             <a:endParaRPr lang="en-US" dirty="0"/>
@@ -2400,7 +2432,11 @@
           <a:lstStyle/>
           <a:p>
             <a:r>
-              <a:rPr lang="en-US" dirty="0"/>
+              <a:rPr lang="ar-SA" dirty="0">
+                <a:latin typeface="Amiri" pitchFamily="2" charset="-78"/>
+                <a:ea typeface="Amiri" pitchFamily="2" charset="-78"/>
+                <a:cs typeface="Amiri" pitchFamily="2" charset="-78"/>
+              </a:rPr>
               <a:t>LANGUAGE BANK (2 min) — times use ordinal numbers in the feminine: فِي السَّاعَةِ الثَّامِنَةِ وَالنِّصْفِ · الرَّابِعَةِ إِلَّا رُبْعًا. أُفَضِّلُ التَّارِيخَ عَلَى الجُغْرَافْيَا، لِأَنَّهُ … · لٰكِنَّهُ …</a:t>
             </a:r>
             <a:endParaRPr lang="en-US" dirty="0"/>
@@ -2668,7 +2704,11 @@
           <a:lstStyle/>
           <a:p>
             <a:r>
-              <a:rPr lang="en-US" dirty="0"/>
+              <a:rPr lang="ar-SA" dirty="0">
+                <a:latin typeface="Amiri" pitchFamily="2" charset="-78"/>
+                <a:ea typeface="Amiri" pitchFamily="2" charset="-78"/>
+                <a:cs typeface="Amiri" pitchFamily="2" charset="-78"/>
+              </a:rPr>
               <a:t>ROLE PLAY B (Core+) — choosing options.
 SET-UP IN THE BREAKOUT ROOM: A = examiner (reads the left column ONLY — the questions, in order), B = candidate (sees the task column; Core may use the help column), C = observer (ticks the feedback checklist). 1 minute preparation, about 3 minutes speaking, 1 minute feedback, then rotate.
 Task ! is the unexpected question: in the exam the candidate has not seen it — the examiner should read it without warning.
@@ -3156,6 +3196,7 @@
                   <a:srgbClr val="D4AF37"/>
                 </a:solidFill>
                 <a:latin typeface="Amiri" pitchFamily="2" charset="-78"/>
+                <a:ea typeface="Amiri" pitchFamily="2" charset="-78"/>
                 <a:cs typeface="Amiri" pitchFamily="2" charset="-78"/>
               </a:rPr>
               <a:t>م</a:t>
@@ -3362,6 +3403,7 @@
                   <a:srgbClr val="D4AF37"/>
                 </a:solidFill>
                 <a:latin typeface="Amiri" pitchFamily="2" charset="-78"/>
+                <a:ea typeface="Amiri" pitchFamily="2" charset="-78"/>
                 <a:cs typeface="Amiri" pitchFamily="2" charset="-78"/>
               </a:rPr>
               <a:t>وَرْشَةُ التَّحَدُّثِ — المَوَادُّ وَالجَدْوَلُ</a:t>
@@ -3413,6 +3455,7 @@
                   <a:srgbClr val="C6D2E6"/>
                 </a:solidFill>
                 <a:latin typeface="Amiri" pitchFamily="2" charset="-78"/>
+                <a:ea typeface="Amiri" pitchFamily="2" charset="-78"/>
                 <a:cs typeface="Amiri" pitchFamily="2" charset="-78"/>
               </a:rPr>
               <a:t>فِي السَّاعَةِ الثَّامِنَةِ وَالنِّصْفِ</a:t>
@@ -3439,6 +3482,7 @@
                   <a:srgbClr val="C6D2E6"/>
                 </a:solidFill>
                 <a:latin typeface="Amiri" pitchFamily="2" charset="-78"/>
+                <a:ea typeface="Amiri" pitchFamily="2" charset="-78"/>
                 <a:cs typeface="Amiri" pitchFamily="2" charset="-78"/>
               </a:rPr>
               <a:t>لِأَنَّ</a:t>
@@ -3465,6 +3509,7 @@
                   <a:srgbClr val="C6D2E6"/>
                 </a:solidFill>
                 <a:latin typeface="Amiri" pitchFamily="2" charset="-78"/>
+                <a:ea typeface="Amiri" pitchFamily="2" charset="-78"/>
                 <a:cs typeface="Amiri" pitchFamily="2" charset="-78"/>
               </a:rPr>
               <a:t>لٰكِنَّ</a:t>
@@ -3491,6 +3536,7 @@
                   <a:srgbClr val="C6D2E6"/>
                 </a:solidFill>
                 <a:latin typeface="Amiri" pitchFamily="2" charset="-78"/>
+                <a:ea typeface="Amiri" pitchFamily="2" charset="-78"/>
                 <a:cs typeface="Amiri" pitchFamily="2" charset="-78"/>
               </a:rPr>
               <a:t>أَصْعَبُ مِنْ</a:t>
@@ -3923,6 +3969,7 @@
                   <a:srgbClr val="D4AF37"/>
                 </a:solidFill>
                 <a:latin typeface="Amiri" pitchFamily="2" charset="-78"/>
+                <a:ea typeface="Amiri" pitchFamily="2" charset="-78"/>
                 <a:cs typeface="Amiri" pitchFamily="2" charset="-78"/>
               </a:rPr>
               <a:t>م</a:t>
@@ -4243,6 +4290,7 @@
                   <a:srgbClr val="8A6D1E"/>
                 </a:solidFill>
                 <a:latin typeface="Amiri" pitchFamily="2" charset="-78"/>
+                <a:ea typeface="Amiri" pitchFamily="2" charset="-78"/>
                 <a:cs typeface="Amiri" pitchFamily="2" charset="-78"/>
               </a:rPr>
               <a:t>لِقَاءُ أَوْلِيَاءِ الأُمُورِ</a:t>
@@ -4523,6 +4571,7 @@
                   <a:srgbClr val="1B3B6F"/>
                 </a:solidFill>
                 <a:latin typeface="Amiri" pitchFamily="2" charset="-78"/>
+                <a:ea typeface="Amiri" pitchFamily="2" charset="-78"/>
                 <a:cs typeface="Amiri" pitchFamily="2" charset="-78"/>
               </a:rPr>
               <a:t>أَصْعَبُ مِنَ السَّنَةِ المَاضِيَةِ، لِأَنَّ …</a:t>
@@ -4599,6 +4648,7 @@
                   <a:srgbClr val="1B3B6F"/>
                 </a:solidFill>
                 <a:latin typeface="Amiri" pitchFamily="2" charset="-78"/>
+                <a:ea typeface="Amiri" pitchFamily="2" charset="-78"/>
                 <a:cs typeface="Amiri" pitchFamily="2" charset="-78"/>
               </a:rPr>
               <a:t>كَيْفَ تَجِدُ الرِّيَاضِيَّاتِ هٰذِهِ السَّنَةَ؟</a:t>
@@ -4702,6 +4752,7 @@
                   <a:srgbClr val="1B3B6F"/>
                 </a:solidFill>
                 <a:latin typeface="Amiri" pitchFamily="2" charset="-78"/>
+                <a:ea typeface="Amiri" pitchFamily="2" charset="-78"/>
                 <a:cs typeface="Amiri" pitchFamily="2" charset="-78"/>
               </a:rPr>
               <a:t>أَتَفَوَّقُ فِي … فَقَدْ حَصَلْتُ عَلَى …</a:t>
@@ -4778,6 +4829,7 @@
                   <a:srgbClr val="1B3B6F"/>
                 </a:solidFill>
                 <a:latin typeface="Amiri" pitchFamily="2" charset="-78"/>
+                <a:ea typeface="Amiri" pitchFamily="2" charset="-78"/>
                 <a:cs typeface="Amiri" pitchFamily="2" charset="-78"/>
               </a:rPr>
               <a:t>وَمَا المَادَّةُ الَّتِي تَتَفَوَّقُ فِيهَا؟</a:t>
@@ -4881,6 +4933,7 @@
                   <a:srgbClr val="1B3B6F"/>
                 </a:solidFill>
                 <a:latin typeface="Amiri" pitchFamily="2" charset="-78"/>
+                <a:ea typeface="Amiri" pitchFamily="2" charset="-78"/>
                 <a:cs typeface="Amiri" pitchFamily="2" charset="-78"/>
               </a:rPr>
               <a:t>مِنَ السَّاعَةِ … إِلَى …</a:t>
@@ -4957,6 +5010,7 @@
                   <a:srgbClr val="1B3B6F"/>
                 </a:solidFill>
                 <a:latin typeface="Amiri" pitchFamily="2" charset="-78"/>
+                <a:ea typeface="Amiri" pitchFamily="2" charset="-78"/>
                 <a:cs typeface="Amiri" pitchFamily="2" charset="-78"/>
               </a:rPr>
               <a:t>كَيْفَ تُنَظِّمُ وَقْتَكَ فِي الأُسْبُوعِ؟</a:t>
@@ -5060,6 +5114,7 @@
                   <a:srgbClr val="1B3B6F"/>
                 </a:solidFill>
                 <a:latin typeface="Amiri" pitchFamily="2" charset="-78"/>
+                <a:ea typeface="Amiri" pitchFamily="2" charset="-78"/>
                 <a:cs typeface="Amiri" pitchFamily="2" charset="-78"/>
               </a:rPr>
               <a:t>كِلْتَاهُمَا مُهِمَّةٌ، بَيْنَمَا …</a:t>
@@ -5136,6 +5191,7 @@
                   <a:srgbClr val="1B3B6F"/>
                 </a:solidFill>
                 <a:latin typeface="Amiri" pitchFamily="2" charset="-78"/>
+                <a:ea typeface="Amiri" pitchFamily="2" charset="-78"/>
                 <a:cs typeface="Amiri" pitchFamily="2" charset="-78"/>
               </a:rPr>
               <a:t>أَيُّهُمَا أَهَمُّ: المَوَادُّ العِلْمِيَّةُ أَمِ الأَدَبِيَّةُ؟</a:t>
@@ -5239,6 +5295,7 @@
                   <a:srgbClr val="1B3B6F"/>
                 </a:solidFill>
                 <a:latin typeface="Amiri" pitchFamily="2" charset="-78"/>
+                <a:ea typeface="Amiri" pitchFamily="2" charset="-78"/>
                 <a:cs typeface="Amiri" pitchFamily="2" charset="-78"/>
               </a:rPr>
               <a:t>سَأَحْضُرُ … وَسَأُرَاجِعُ …</a:t>
@@ -5315,6 +5372,7 @@
                   <a:srgbClr val="1B3B6F"/>
                 </a:solidFill>
                 <a:latin typeface="Amiri" pitchFamily="2" charset="-78"/>
+                <a:ea typeface="Amiri" pitchFamily="2" charset="-78"/>
                 <a:cs typeface="Amiri" pitchFamily="2" charset="-78"/>
               </a:rPr>
               <a:t>مَاذَا سَتَفْعَلُ لِتَتَحَسَّنَ فِي الرِّيَاضِيَّاتِ؟</a:t>
@@ -5524,6 +5582,7 @@
                   <a:srgbClr val="D4AF37"/>
                 </a:solidFill>
                 <a:latin typeface="Amiri" pitchFamily="2" charset="-78"/>
+                <a:ea typeface="Amiri" pitchFamily="2" charset="-78"/>
                 <a:cs typeface="Amiri" pitchFamily="2" charset="-78"/>
               </a:rPr>
               <a:t>م</a:t>
@@ -5844,6 +5903,7 @@
                   <a:srgbClr val="8A6D1E"/>
                 </a:solidFill>
                 <a:latin typeface="Amiri" pitchFamily="2" charset="-78"/>
+                <a:ea typeface="Amiri" pitchFamily="2" charset="-78"/>
                 <a:cs typeface="Amiri" pitchFamily="2" charset="-78"/>
               </a:rPr>
               <a:t>هَلْ يَبْدَأُ اليَوْمُ الدِّرَاسِيُّ مُتَأَخِّرًا؟</a:t>
@@ -6124,6 +6184,7 @@
                   <a:srgbClr val="1B3B6F"/>
                 </a:solidFill>
                 <a:latin typeface="Amiri" pitchFamily="2" charset="-78"/>
+                <a:ea typeface="Amiri" pitchFamily="2" charset="-78"/>
                 <a:cs typeface="Amiri" pitchFamily="2" charset="-78"/>
               </a:rPr>
               <a:t>لِأَنَّ الدِّرَاسَاتِ تُؤَكِّدُ أَنَّ …</a:t>
@@ -6200,6 +6261,7 @@
                   <a:srgbClr val="1B3B6F"/>
                 </a:solidFill>
                 <a:latin typeface="Amiri" pitchFamily="2" charset="-78"/>
+                <a:ea typeface="Amiri" pitchFamily="2" charset="-78"/>
                 <a:cs typeface="Amiri" pitchFamily="2" charset="-78"/>
               </a:rPr>
               <a:t>تَقْتَرِحُونَ أَنْ يَبْدَأَ اليَوْمُ فِي التَّاسِعَةِ وَالنِّصْفِ. لِمَاذَا؟</a:t>
@@ -6303,6 +6365,7 @@
                   <a:srgbClr val="1B3B6F"/>
                 </a:solidFill>
                 <a:latin typeface="Amiri" pitchFamily="2" charset="-78"/>
+                <a:ea typeface="Amiri" pitchFamily="2" charset="-78"/>
                 <a:cs typeface="Amiri" pitchFamily="2" charset="-78"/>
               </a:rPr>
               <a:t>صَحِيحٌ أَنَّ … غَيْرَ أَنَّ …</a:t>
@@ -6379,6 +6442,7 @@
                   <a:srgbClr val="1B3B6F"/>
                 </a:solidFill>
                 <a:latin typeface="Amiri" pitchFamily="2" charset="-78"/>
+                <a:ea typeface="Amiri" pitchFamily="2" charset="-78"/>
                 <a:cs typeface="Amiri" pitchFamily="2" charset="-78"/>
               </a:rPr>
               <a:t>لٰكِنَّ اليَوْمَ سَيَنْتَهِي مُتَأَخِّرًا!</a:t>
@@ -6482,6 +6546,7 @@
                   <a:srgbClr val="1B3B6F"/>
                 </a:solidFill>
                 <a:latin typeface="Amiri" pitchFamily="2" charset="-78"/>
+                <a:ea typeface="Amiri" pitchFamily="2" charset="-78"/>
                 <a:cs typeface="Amiri" pitchFamily="2" charset="-78"/>
               </a:rPr>
               <a:t>نَعَمْ، فِي أُسْبُوعِ … فَتَحَسَّنَتْ …</a:t>
@@ -6558,6 +6623,7 @@
                   <a:srgbClr val="1B3B6F"/>
                 </a:solidFill>
                 <a:latin typeface="Amiri" pitchFamily="2" charset="-78"/>
+                <a:ea typeface="Amiri" pitchFamily="2" charset="-78"/>
                 <a:cs typeface="Amiri" pitchFamily="2" charset="-78"/>
               </a:rPr>
               <a:t>هَلْ جَرَّبْتُمْ ذٰلِكَ؟</a:t>
@@ -6661,6 +6727,7 @@
                   <a:srgbClr val="1B3B6F"/>
                 </a:solidFill>
                 <a:latin typeface="Amiri" pitchFamily="2" charset="-78"/>
+                <a:ea typeface="Amiri" pitchFamily="2" charset="-78"/>
                 <a:cs typeface="Amiri" pitchFamily="2" charset="-78"/>
               </a:rPr>
               <a:t>مِنْ نَاحِيَةٍ … وَمِنْ نَاحِيَةٍ أُخْرَى … لِذٰلِكَ …</a:t>
@@ -6737,6 +6804,7 @@
                   <a:srgbClr val="1B3B6F"/>
                 </a:solidFill>
                 <a:latin typeface="Amiri" pitchFamily="2" charset="-78"/>
+                <a:ea typeface="Amiri" pitchFamily="2" charset="-78"/>
                 <a:cs typeface="Amiri" pitchFamily="2" charset="-78"/>
               </a:rPr>
               <a:t>وَمَاذَا عَنِ الطُّلَّابِ الَّذِينَ يَعْمَلُ وَالِدَاهُمْ مُبَكِّرًا؟</a:t>
@@ -6840,6 +6908,7 @@
                   <a:srgbClr val="1B3B6F"/>
                 </a:solidFill>
                 <a:latin typeface="Amiri" pitchFamily="2" charset="-78"/>
+                <a:ea typeface="Amiri" pitchFamily="2" charset="-78"/>
                 <a:cs typeface="Amiri" pitchFamily="2" charset="-78"/>
               </a:rPr>
               <a:t>لَوْ صَمَّمْتُهُ، لَوَضَعْتُ …</a:t>
@@ -6916,6 +6985,7 @@
                   <a:srgbClr val="1B3B6F"/>
                 </a:solidFill>
                 <a:latin typeface="Amiri" pitchFamily="2" charset="-78"/>
+                <a:ea typeface="Amiri" pitchFamily="2" charset="-78"/>
                 <a:cs typeface="Amiri" pitchFamily="2" charset="-78"/>
               </a:rPr>
               <a:t>لَوْ صَمَّمْتَ الجَدْوَلَ بِنَفْسِكَ، مَاذَا تُغَيِّرُ؟</a:t>
@@ -7125,6 +7195,7 @@
                   <a:srgbClr val="D4AF37"/>
                 </a:solidFill>
                 <a:latin typeface="Amiri" pitchFamily="2" charset="-78"/>
+                <a:ea typeface="Amiri" pitchFamily="2" charset="-78"/>
                 <a:cs typeface="Amiri" pitchFamily="2" charset="-78"/>
               </a:rPr>
               <a:t>م</a:t>
@@ -7445,6 +7516,7 @@
                   <a:srgbClr val="8A6D1E"/>
                 </a:solidFill>
                 <a:latin typeface="Amiri" pitchFamily="2" charset="-78"/>
+                <a:ea typeface="Amiri" pitchFamily="2" charset="-78"/>
                 <a:cs typeface="Amiri" pitchFamily="2" charset="-78"/>
               </a:rPr>
               <a:t>وَرَقَةُ المُلَاحِظِ</a:t>
@@ -8915,6 +8987,7 @@
                   <a:srgbClr val="D4AF37"/>
                 </a:solidFill>
                 <a:latin typeface="Amiri" pitchFamily="2" charset="-78"/>
+                <a:ea typeface="Amiri" pitchFamily="2" charset="-78"/>
                 <a:cs typeface="Amiri" pitchFamily="2" charset="-78"/>
               </a:rPr>
               <a:t>م</a:t>
@@ -9235,6 +9308,7 @@
                   <a:srgbClr val="8A6D1E"/>
                 </a:solidFill>
                 <a:latin typeface="Amiri" pitchFamily="2" charset="-78"/>
+                <a:ea typeface="Amiri" pitchFamily="2" charset="-78"/>
                 <a:cs typeface="Amiri" pitchFamily="2" charset="-78"/>
               </a:rPr>
               <a:t>نَمُوذَجُ الإِجَابَةِ</a:t>
@@ -9477,6 +9551,7 @@
                   <a:srgbClr val="1B3B6F"/>
                 </a:solidFill>
                 <a:latin typeface="Amiri" pitchFamily="2" charset="-78"/>
+                <a:ea typeface="Amiri" pitchFamily="2" charset="-78"/>
                 <a:cs typeface="Amiri" pitchFamily="2" charset="-78"/>
               </a:rPr>
               <a:t>الحِصَّةُ الأُولَى الرِّيَاضِيَّاتُ.</a:t>
@@ -9553,6 +9628,7 @@
                   <a:srgbClr val="1B3B6F"/>
                 </a:solidFill>
                 <a:latin typeface="Amiri" pitchFamily="2" charset="-78"/>
+                <a:ea typeface="Amiri" pitchFamily="2" charset="-78"/>
                 <a:cs typeface="Amiri" pitchFamily="2" charset="-78"/>
               </a:rPr>
               <a:t>مَا الحِصَّةُ الأُولَى اليَوْمَ؟</a:t>
@@ -9656,6 +9732,7 @@
                   <a:srgbClr val="1B3B6F"/>
                 </a:solidFill>
                 <a:latin typeface="Amiri" pitchFamily="2" charset="-78"/>
+                <a:ea typeface="Amiri" pitchFamily="2" charset="-78"/>
                 <a:cs typeface="Amiri" pitchFamily="2" charset="-78"/>
               </a:rPr>
               <a:t>تَبْدَأُ فِي السَّاعَةِ الثَّامِنَةِ وَالنِّصْفِ.</a:t>
@@ -9732,6 +9809,7 @@
                   <a:srgbClr val="1B3B6F"/>
                 </a:solidFill>
                 <a:latin typeface="Amiri" pitchFamily="2" charset="-78"/>
+                <a:ea typeface="Amiri" pitchFamily="2" charset="-78"/>
                 <a:cs typeface="Amiri" pitchFamily="2" charset="-78"/>
               </a:rPr>
               <a:t>مَتَى تَبْدَأُ؟</a:t>
@@ -9835,6 +9913,7 @@
                   <a:srgbClr val="1B3B6F"/>
                 </a:solidFill>
                 <a:latin typeface="Amiri" pitchFamily="2" charset="-78"/>
+                <a:ea typeface="Amiri" pitchFamily="2" charset="-78"/>
                 <a:cs typeface="Amiri" pitchFamily="2" charset="-78"/>
               </a:rPr>
               <a:t>الاسْتِرَاحَةُ فِي السَّاعَةِ العَاشِرَةِ وَالرُّبْعِ.</a:t>
@@ -9911,6 +9990,7 @@
                   <a:srgbClr val="1B3B6F"/>
                 </a:solidFill>
                 <a:latin typeface="Amiri" pitchFamily="2" charset="-78"/>
+                <a:ea typeface="Amiri" pitchFamily="2" charset="-78"/>
                 <a:cs typeface="Amiri" pitchFamily="2" charset="-78"/>
               </a:rPr>
               <a:t>وَمَتَى الاسْتِرَاحَةُ؟</a:t>
@@ -10014,6 +10094,7 @@
                   <a:srgbClr val="1B3B6F"/>
                 </a:solidFill>
                 <a:latin typeface="Amiri" pitchFamily="2" charset="-78"/>
+                <a:ea typeface="Amiri" pitchFamily="2" charset="-78"/>
                 <a:cs typeface="Amiri" pitchFamily="2" charset="-78"/>
               </a:rPr>
               <a:t>أُحِبُّ العُلُومَ، لِأَنَّهَا مُمْتِعَةٌ.</a:t>
@@ -10090,6 +10171,7 @@
                   <a:srgbClr val="1B3B6F"/>
                 </a:solidFill>
                 <a:latin typeface="Amiri" pitchFamily="2" charset="-78"/>
+                <a:ea typeface="Amiri" pitchFamily="2" charset="-78"/>
                 <a:cs typeface="Amiri" pitchFamily="2" charset="-78"/>
               </a:rPr>
               <a:t>عِنْدَنَا عُلُومٌ بَعْدَ الاسْتِرَاحَةِ.</a:t>
@@ -10193,6 +10275,7 @@
                   <a:srgbClr val="1B3B6F"/>
                 </a:solidFill>
                 <a:latin typeface="Amiri" pitchFamily="2" charset="-78"/>
+                <a:ea typeface="Amiri" pitchFamily="2" charset="-78"/>
                 <a:cs typeface="Amiri" pitchFamily="2" charset="-78"/>
               </a:rPr>
               <a:t>يَنْتَهِي فِي السَّاعَةِ الثَّالِثَةِ.</a:t>
@@ -10269,6 +10352,7 @@
                   <a:srgbClr val="1B3B6F"/>
                 </a:solidFill>
                 <a:latin typeface="Amiri" pitchFamily="2" charset="-78"/>
+                <a:ea typeface="Amiri" pitchFamily="2" charset="-78"/>
                 <a:cs typeface="Amiri" pitchFamily="2" charset="-78"/>
               </a:rPr>
               <a:t>مَتَى يَنْتَهِي اليَوْمُ الدِّرَاسِيُّ؟</a:t>
@@ -10478,6 +10562,7 @@
                   <a:srgbClr val="D4AF37"/>
                 </a:solidFill>
                 <a:latin typeface="Amiri" pitchFamily="2" charset="-78"/>
+                <a:ea typeface="Amiri" pitchFamily="2" charset="-78"/>
                 <a:cs typeface="Amiri" pitchFamily="2" charset="-78"/>
               </a:rPr>
               <a:t>م</a:t>
@@ -10798,6 +10883,7 @@
                   <a:srgbClr val="8A6D1E"/>
                 </a:solidFill>
                 <a:latin typeface="Amiri" pitchFamily="2" charset="-78"/>
+                <a:ea typeface="Amiri" pitchFamily="2" charset="-78"/>
                 <a:cs typeface="Amiri" pitchFamily="2" charset="-78"/>
               </a:rPr>
               <a:t>نَمُوذَجُ الإِجَابَةِ</a:t>
@@ -11040,6 +11126,7 @@
                   <a:srgbClr val="1B3B6F"/>
                 </a:solidFill>
                 <a:latin typeface="Amiri" pitchFamily="2" charset="-78"/>
+                <a:ea typeface="Amiri" pitchFamily="2" charset="-78"/>
                 <a:cs typeface="Amiri" pitchFamily="2" charset="-78"/>
               </a:rPr>
               <a:t>أُرِيدُ أَنْ أَخْتَارَ التَّارِيخَ وَالعَرَبِيَّةَ.</a:t>
@@ -11116,6 +11203,7 @@
                   <a:srgbClr val="1B3B6F"/>
                 </a:solidFill>
                 <a:latin typeface="Amiri" pitchFamily="2" charset="-78"/>
+                <a:ea typeface="Amiri" pitchFamily="2" charset="-78"/>
                 <a:cs typeface="Amiri" pitchFamily="2" charset="-78"/>
               </a:rPr>
               <a:t>أَيَّ مَوَادَّ تُرِيدُ أَنْ تَخْتَارَ؟</a:t>
@@ -11219,6 +11307,7 @@
                   <a:srgbClr val="1B3B6F"/>
                 </a:solidFill>
                 <a:latin typeface="Amiri" pitchFamily="2" charset="-78"/>
+                <a:ea typeface="Amiri" pitchFamily="2" charset="-78"/>
                 <a:cs typeface="Amiri" pitchFamily="2" charset="-78"/>
               </a:rPr>
               <a:t>لِأَنَّهُ مُمْتِعٌ، وَالمُعَلِّمُ مُمْتَازٌ.</a:t>
@@ -11295,6 +11384,7 @@
                   <a:srgbClr val="1B3B6F"/>
                 </a:solidFill>
                 <a:latin typeface="Amiri" pitchFamily="2" charset="-78"/>
+                <a:ea typeface="Amiri" pitchFamily="2" charset="-78"/>
                 <a:cs typeface="Amiri" pitchFamily="2" charset="-78"/>
               </a:rPr>
               <a:t>لِمَاذَا التَّارِيخُ؟</a:t>
@@ -11398,6 +11488,7 @@
                   <a:srgbClr val="1B3B6F"/>
                 </a:solidFill>
                 <a:latin typeface="Amiri" pitchFamily="2" charset="-78"/>
+                <a:ea typeface="Amiri" pitchFamily="2" charset="-78"/>
                 <a:cs typeface="Amiri" pitchFamily="2" charset="-78"/>
               </a:rPr>
               <a:t>أُفَضِّلُ التَّارِيخَ عَلَى الجُغْرَافْيَا، لِأَنَّهُ أَقْرَبُ إِلَى اهْتِمَامَاتِي، لٰكِنَّ الجُغْرَافْيَا سَهْلَةٌ أَيْضًا.</a:t>
@@ -11474,6 +11565,7 @@
                   <a:srgbClr val="1B3B6F"/>
                 </a:solidFill>
                 <a:latin typeface="Amiri" pitchFamily="2" charset="-78"/>
+                <a:ea typeface="Amiri" pitchFamily="2" charset="-78"/>
                 <a:cs typeface="Amiri" pitchFamily="2" charset="-78"/>
               </a:rPr>
               <a:t>وَالجُغْرَافْيَا؟ دَرَجَاتُكَ فِيهَا جَيِّدَةٌ.</a:t>
@@ -11577,6 +11669,7 @@
                   <a:srgbClr val="1B3B6F"/>
                 </a:solidFill>
                 <a:latin typeface="Amiri" pitchFamily="2" charset="-78"/>
+                <a:ea typeface="Amiri" pitchFamily="2" charset="-78"/>
                 <a:cs typeface="Amiri" pitchFamily="2" charset="-78"/>
               </a:rPr>
               <a:t>كَمْ حِصَّةً فِي الأُسْبُوعِ لِلْعَرَبِيَّةِ؟</a:t>
@@ -11653,6 +11746,7 @@
                   <a:srgbClr val="1B3B6F"/>
                 </a:solidFill>
                 <a:latin typeface="Amiri" pitchFamily="2" charset="-78"/>
+                <a:ea typeface="Amiri" pitchFamily="2" charset="-78"/>
                 <a:cs typeface="Amiri" pitchFamily="2" charset="-78"/>
               </a:rPr>
               <a:t>تَذَكَّرْ: العَرَبِيَّةُ تَحْتَاجُ إِلَى وَقْتٍ كَثِيرٍ.</a:t>
@@ -11756,6 +11850,7 @@
                   <a:srgbClr val="1B3B6F"/>
                 </a:solidFill>
                 <a:latin typeface="Amiri" pitchFamily="2" charset="-78"/>
+                <a:ea typeface="Amiri" pitchFamily="2" charset="-78"/>
                 <a:cs typeface="Amiri" pitchFamily="2" charset="-78"/>
               </a:rPr>
               <a:t>لَنْ أَخْتَارَ المُوسِيقَى، لِأَنَّهَا صَعْبَةٌ عَلَيَّ، مَعَ أَنِّي أُحِبُّ الاسْتِمَاعَ إِلَيْهَا.</a:t>
@@ -11832,6 +11927,7 @@
                   <a:srgbClr val="1B3B6F"/>
                 </a:solidFill>
                 <a:latin typeface="Amiri" pitchFamily="2" charset="-78"/>
+                <a:ea typeface="Amiri" pitchFamily="2" charset="-78"/>
                 <a:cs typeface="Amiri" pitchFamily="2" charset="-78"/>
               </a:rPr>
               <a:t>مَا المَادَّةُ الَّتِي لَنْ تَخْتَارَهَا؟</a:t>
@@ -12041,6 +12137,7 @@
                   <a:srgbClr val="D4AF37"/>
                 </a:solidFill>
                 <a:latin typeface="Amiri" pitchFamily="2" charset="-78"/>
+                <a:ea typeface="Amiri" pitchFamily="2" charset="-78"/>
                 <a:cs typeface="Amiri" pitchFamily="2" charset="-78"/>
               </a:rPr>
               <a:t>م</a:t>
@@ -12361,6 +12458,7 @@
                   <a:srgbClr val="8A6D1E"/>
                 </a:solidFill>
                 <a:latin typeface="Amiri" pitchFamily="2" charset="-78"/>
+                <a:ea typeface="Amiri" pitchFamily="2" charset="-78"/>
                 <a:cs typeface="Amiri" pitchFamily="2" charset="-78"/>
               </a:rPr>
               <a:t>نَمُوذَجُ الإِجَابَةِ</a:t>
@@ -12603,6 +12701,7 @@
                   <a:srgbClr val="1B3B6F"/>
                 </a:solidFill>
                 <a:latin typeface="Amiri" pitchFamily="2" charset="-78"/>
+                <a:ea typeface="Amiri" pitchFamily="2" charset="-78"/>
                 <a:cs typeface="Amiri" pitchFamily="2" charset="-78"/>
               </a:rPr>
               <a:t>أَجِدُهَا أَصْعَبَ مِنَ السَّنَةِ المَاضِيَةِ، لِأَنَّ الجَبْرَ جَدِيدٌ عَلَيَّ.</a:t>
@@ -12679,6 +12778,7 @@
                   <a:srgbClr val="1B3B6F"/>
                 </a:solidFill>
                 <a:latin typeface="Amiri" pitchFamily="2" charset="-78"/>
+                <a:ea typeface="Amiri" pitchFamily="2" charset="-78"/>
                 <a:cs typeface="Amiri" pitchFamily="2" charset="-78"/>
               </a:rPr>
               <a:t>كَيْفَ تَجِدُ الرِّيَاضِيَّاتِ هٰذِهِ السَّنَةَ؟</a:t>
@@ -12782,6 +12882,7 @@
                   <a:srgbClr val="1B3B6F"/>
                 </a:solidFill>
                 <a:latin typeface="Amiri" pitchFamily="2" charset="-78"/>
+                <a:ea typeface="Amiri" pitchFamily="2" charset="-78"/>
                 <a:cs typeface="Amiri" pitchFamily="2" charset="-78"/>
               </a:rPr>
               <a:t>أَتَفَوَّقُ فِي العَرَبِيَّةِ؛ فَقَدْ حَصَلْتُ عَلَى أَعْلَى دَرَجَةٍ فِي الامْتِحَانِ الأَخِيرِ.</a:t>
@@ -12858,6 +12959,7 @@
                   <a:srgbClr val="1B3B6F"/>
                 </a:solidFill>
                 <a:latin typeface="Amiri" pitchFamily="2" charset="-78"/>
+                <a:ea typeface="Amiri" pitchFamily="2" charset="-78"/>
                 <a:cs typeface="Amiri" pitchFamily="2" charset="-78"/>
               </a:rPr>
               <a:t>وَمَا المَادَّةُ الَّتِي تَتَفَوَّقُ فِيهَا؟</a:t>
@@ -12961,6 +13063,7 @@
                   <a:srgbClr val="1B3B6F"/>
                 </a:solidFill>
                 <a:latin typeface="Amiri" pitchFamily="2" charset="-78"/>
+                <a:ea typeface="Amiri" pitchFamily="2" charset="-78"/>
                 <a:cs typeface="Amiri" pitchFamily="2" charset="-78"/>
               </a:rPr>
               <a:t>أُرَاجِعُ مِنَ السَّاعَةِ الخَامِسَةِ إِلَى السَّادِسَةِ كُلَّ يَوْمٍ، وَأُخَصِّصُ يَوْمَ السَّبْتِ لِلرِّيَاضِيَّاتِ.</a:t>
@@ -13037,6 +13140,7 @@
                   <a:srgbClr val="1B3B6F"/>
                 </a:solidFill>
                 <a:latin typeface="Amiri" pitchFamily="2" charset="-78"/>
+                <a:ea typeface="Amiri" pitchFamily="2" charset="-78"/>
                 <a:cs typeface="Amiri" pitchFamily="2" charset="-78"/>
               </a:rPr>
               <a:t>كَيْفَ تُنَظِّمُ وَقْتَكَ فِي الأُسْبُوعِ؟</a:t>
@@ -13140,6 +13244,7 @@
                   <a:srgbClr val="1B3B6F"/>
                 </a:solidFill>
                 <a:latin typeface="Amiri" pitchFamily="2" charset="-78"/>
+                <a:ea typeface="Amiri" pitchFamily="2" charset="-78"/>
                 <a:cs typeface="Amiri" pitchFamily="2" charset="-78"/>
               </a:rPr>
               <a:t>كِلْتَاهُمَا مُهِمَّةٌ؛ فَالعِلْمِيَّةُ تُعَلِّمُنَا التَّفْكِيرَ المَنْطِقِيَّ، بَيْنَمَا تُعَلِّمُنَا الأَدَبِيَّةُ التَّعْبِيرَ وَفَهْمَ الآخَرِينَ.</a:t>
@@ -13216,6 +13321,7 @@
                   <a:srgbClr val="1B3B6F"/>
                 </a:solidFill>
                 <a:latin typeface="Amiri" pitchFamily="2" charset="-78"/>
+                <a:ea typeface="Amiri" pitchFamily="2" charset="-78"/>
                 <a:cs typeface="Amiri" pitchFamily="2" charset="-78"/>
               </a:rPr>
               <a:t>أَيُّهُمَا أَهَمُّ: المَوَادُّ العِلْمِيَّةُ أَمِ الأَدَبِيَّةُ؟</a:t>
@@ -13319,6 +13425,7 @@
                   <a:srgbClr val="1B3B6F"/>
                 </a:solidFill>
                 <a:latin typeface="Amiri" pitchFamily="2" charset="-78"/>
+                <a:ea typeface="Amiri" pitchFamily="2" charset="-78"/>
                 <a:cs typeface="Amiri" pitchFamily="2" charset="-78"/>
               </a:rPr>
               <a:t>سَأَحْضُرُ دُرُوسَ الدَّعْمِ يَوْمَ الأَرْبِعَاءِ، وَسَأُرَاجِعُ التَّمَارِينَ مَعَ صَدِيقِي.</a:t>
@@ -13395,6 +13502,7 @@
                   <a:srgbClr val="1B3B6F"/>
                 </a:solidFill>
                 <a:latin typeface="Amiri" pitchFamily="2" charset="-78"/>
+                <a:ea typeface="Amiri" pitchFamily="2" charset="-78"/>
                 <a:cs typeface="Amiri" pitchFamily="2" charset="-78"/>
               </a:rPr>
               <a:t>مَاذَا سَتَفْعَلُ لِتَتَحَسَّنَ فِي الرِّيَاضِيَّاتِ؟</a:t>
@@ -13604,6 +13712,7 @@
                   <a:srgbClr val="D4AF37"/>
                 </a:solidFill>
                 <a:latin typeface="Amiri" pitchFamily="2" charset="-78"/>
+                <a:ea typeface="Amiri" pitchFamily="2" charset="-78"/>
                 <a:cs typeface="Amiri" pitchFamily="2" charset="-78"/>
               </a:rPr>
               <a:t>م</a:t>
@@ -13924,6 +14033,7 @@
                   <a:srgbClr val="8A6D1E"/>
                 </a:solidFill>
                 <a:latin typeface="Amiri" pitchFamily="2" charset="-78"/>
+                <a:ea typeface="Amiri" pitchFamily="2" charset="-78"/>
                 <a:cs typeface="Amiri" pitchFamily="2" charset="-78"/>
               </a:rPr>
               <a:t>نَمُوذَجُ الإِجَابَةِ</a:t>
@@ -14166,6 +14276,7 @@
                   <a:srgbClr val="1B3B6F"/>
                 </a:solidFill>
                 <a:latin typeface="Amiri" pitchFamily="2" charset="-78"/>
+                <a:ea typeface="Amiri" pitchFamily="2" charset="-78"/>
                 <a:cs typeface="Amiri" pitchFamily="2" charset="-78"/>
               </a:rPr>
               <a:t>لِأَنَّ الدِّرَاسَاتِ تُؤَكِّدُ أَنَّ المُرَاهِقِينَ يَحْتَاجُونَ إِلَى نَوْمٍ أَكْثَرَ، وَأَنَّ تَرْكِيزَهُمْ يَكُونُ أَضْعَفَ فِي الصَّبَاحِ البَاكِرِ.</a:t>
@@ -14245,6 +14356,7 @@
                   <a:srgbClr val="1B3B6F"/>
                 </a:solidFill>
                 <a:latin typeface="Amiri" pitchFamily="2" charset="-78"/>
+                <a:ea typeface="Amiri" pitchFamily="2" charset="-78"/>
                 <a:cs typeface="Amiri" pitchFamily="2" charset="-78"/>
               </a:rPr>
               <a:t>تَقْتَرِحُونَ أَنْ يَبْدَأَ اليَوْمُ فِي التَّاسِعَةِ وَالنِّصْفِ. لِمَاذَا؟</a:t>
@@ -14348,6 +14460,7 @@
                   <a:srgbClr val="1B3B6F"/>
                 </a:solidFill>
                 <a:latin typeface="Amiri" pitchFamily="2" charset="-78"/>
+                <a:ea typeface="Amiri" pitchFamily="2" charset="-78"/>
                 <a:cs typeface="Amiri" pitchFamily="2" charset="-78"/>
               </a:rPr>
               <a:t>صَحِيحٌ أَنَّهُ سَيَنْتَهِي فِي الرَّابِعَةِ، غَيْرَ أَنَّ حِصَّةً وَاحِدَةً بِتَرْكِيزٍ كَامِلٍ أَفْضَلُ مِنْ حِصَّتَيْنِ بِعُيُونٍ نَاعِسَةٍ.</a:t>
@@ -14424,6 +14537,7 @@
                   <a:srgbClr val="1B3B6F"/>
                 </a:solidFill>
                 <a:latin typeface="Amiri" pitchFamily="2" charset="-78"/>
+                <a:ea typeface="Amiri" pitchFamily="2" charset="-78"/>
                 <a:cs typeface="Amiri" pitchFamily="2" charset="-78"/>
               </a:rPr>
               <a:t>لٰكِنَّ اليَوْمَ سَيَنْتَهِي مُتَأَخِّرًا!</a:t>
@@ -14527,6 +14641,7 @@
                   <a:srgbClr val="1B3B6F"/>
                 </a:solidFill>
                 <a:latin typeface="Amiri" pitchFamily="2" charset="-78"/>
+                <a:ea typeface="Amiri" pitchFamily="2" charset="-78"/>
                 <a:cs typeface="Amiri" pitchFamily="2" charset="-78"/>
               </a:rPr>
               <a:t>نَعَمْ، فِي أُسْبُوعِ الامْتِحَانَاتِ بَدَأْنَا فِي العَاشِرَةِ، فَتَحَسَّنَتْ نَتَائِجُ الحِصَّةِ الأُولَى بِشَكْلٍ مَلْحُوظٍ.</a:t>
@@ -14603,6 +14718,7 @@
                   <a:srgbClr val="1B3B6F"/>
                 </a:solidFill>
                 <a:latin typeface="Amiri" pitchFamily="2" charset="-78"/>
+                <a:ea typeface="Amiri" pitchFamily="2" charset="-78"/>
                 <a:cs typeface="Amiri" pitchFamily="2" charset="-78"/>
               </a:rPr>
               <a:t>هَلْ جَرَّبْتُمْ ذٰلِكَ؟</a:t>
@@ -14706,6 +14822,7 @@
                   <a:srgbClr val="1B3B6F"/>
                 </a:solidFill>
                 <a:latin typeface="Amiri" pitchFamily="2" charset="-78"/>
+                <a:ea typeface="Amiri" pitchFamily="2" charset="-78"/>
                 <a:cs typeface="Amiri" pitchFamily="2" charset="-78"/>
               </a:rPr>
               <a:t>مِنْ نَاحِيَةٍ، يَجِبُ أَنْ نُرَاعِيَهُمْ، وَمِنْ نَاحِيَةٍ أُخْرَى، يُمْكِنُ أَنْ نَفْتَحَ المَكْتَبَةَ فِي الثَّامِنَةِ لِلدِّرَاسَةِ الهَادِئَةِ؛ لِذٰلِكَ لَا يَخْسَرُ أَحَدٌ.</a:t>
@@ -14782,6 +14899,7 @@
                   <a:srgbClr val="1B3B6F"/>
                 </a:solidFill>
                 <a:latin typeface="Amiri" pitchFamily="2" charset="-78"/>
+                <a:ea typeface="Amiri" pitchFamily="2" charset="-78"/>
                 <a:cs typeface="Amiri" pitchFamily="2" charset="-78"/>
               </a:rPr>
               <a:t>وَمَاذَا عَنِ الطُّلَّابِ الَّذِينَ يَعْمَلُ وَالِدَاهُمْ مُبَكِّرًا؟</a:t>
@@ -14885,6 +15003,7 @@
                   <a:srgbClr val="1B3B6F"/>
                 </a:solidFill>
                 <a:latin typeface="Amiri" pitchFamily="2" charset="-78"/>
+                <a:ea typeface="Amiri" pitchFamily="2" charset="-78"/>
                 <a:cs typeface="Amiri" pitchFamily="2" charset="-78"/>
               </a:rPr>
               <a:t>لَوْ صَمَّمْتُهُ، لَوَضَعْتُ المَوَادَّ الصَّعْبَةَ فِي مُنْتَصَفِ الصَّبَاحِ، وَلَجَعَلْتُ الرِّيَاضَةَ بَعْدَ الغَدَاءِ، لِأَنَّ الطَّاقَةَ تَقِلُّ عِنْدَئِذٍ.</a:t>
@@ -14961,6 +15080,7 @@
                   <a:srgbClr val="1B3B6F"/>
                 </a:solidFill>
                 <a:latin typeface="Amiri" pitchFamily="2" charset="-78"/>
+                <a:ea typeface="Amiri" pitchFamily="2" charset="-78"/>
                 <a:cs typeface="Amiri" pitchFamily="2" charset="-78"/>
               </a:rPr>
               <a:t>لَوْ صَمَّمْتَ الجَدْوَلَ بِنَفْسِكَ، مَاذَا تُغَيِّرُ؟</a:t>
@@ -15170,6 +15290,7 @@
                   <a:srgbClr val="D4AF37"/>
                 </a:solidFill>
                 <a:latin typeface="Amiri" pitchFamily="2" charset="-78"/>
+                <a:ea typeface="Amiri" pitchFamily="2" charset="-78"/>
                 <a:cs typeface="Amiri" pitchFamily="2" charset="-78"/>
               </a:rPr>
               <a:t>م</a:t>
@@ -15490,6 +15611,7 @@
                   <a:srgbClr val="8A6D1E"/>
                 </a:solidFill>
                 <a:latin typeface="Amiri" pitchFamily="2" charset="-78"/>
+                <a:ea typeface="Amiri" pitchFamily="2" charset="-78"/>
                 <a:cs typeface="Amiri" pitchFamily="2" charset="-78"/>
               </a:rPr>
               <a:t>مَوَادِّي</a:t>
@@ -15770,6 +15892,7 @@
                   <a:srgbClr val="1B3B6F"/>
                 </a:solidFill>
                 <a:latin typeface="Amiri" pitchFamily="2" charset="-78"/>
+                <a:ea typeface="Amiri" pitchFamily="2" charset="-78"/>
                 <a:cs typeface="Amiri" pitchFamily="2" charset="-78"/>
               </a:rPr>
               <a:t>مَادَّتِي المُفَضَّلَةُ …</a:t>
@@ -15846,6 +15969,7 @@
                   <a:srgbClr val="1B3B6F"/>
                 </a:solidFill>
                 <a:latin typeface="Amiri" pitchFamily="2" charset="-78"/>
+                <a:ea typeface="Amiri" pitchFamily="2" charset="-78"/>
                 <a:cs typeface="Amiri" pitchFamily="2" charset="-78"/>
               </a:rPr>
               <a:t>مَا مَادَّتُكَ المُفَضَّلَةُ؟</a:t>
@@ -16014,6 +16138,7 @@
                   <a:srgbClr val="1B3B6F"/>
                 </a:solidFill>
                 <a:latin typeface="Amiri" pitchFamily="2" charset="-78"/>
+                <a:ea typeface="Amiri" pitchFamily="2" charset="-78"/>
                 <a:cs typeface="Amiri" pitchFamily="2" charset="-78"/>
               </a:rPr>
               <a:t>لِأَنَّهَا / لِأَنَّهُ …</a:t>
@@ -16090,6 +16215,7 @@
                   <a:srgbClr val="1B3B6F"/>
                 </a:solidFill>
                 <a:latin typeface="Amiri" pitchFamily="2" charset="-78"/>
+                <a:ea typeface="Amiri" pitchFamily="2" charset="-78"/>
                 <a:cs typeface="Amiri" pitchFamily="2" charset="-78"/>
               </a:rPr>
               <a:t>لِمَاذَا تُحِبُّهَا؟</a:t>
@@ -16258,6 +16384,7 @@
                   <a:srgbClr val="1B3B6F"/>
                 </a:solidFill>
                 <a:latin typeface="Amiri" pitchFamily="2" charset="-78"/>
+                <a:ea typeface="Amiri" pitchFamily="2" charset="-78"/>
                 <a:cs typeface="Amiri" pitchFamily="2" charset="-78"/>
               </a:rPr>
               <a:t>يَبْدَأُ فِي السَّاعَةِ …</a:t>
@@ -16334,6 +16461,7 @@
                   <a:srgbClr val="1B3B6F"/>
                 </a:solidFill>
                 <a:latin typeface="Amiri" pitchFamily="2" charset="-78"/>
+                <a:ea typeface="Amiri" pitchFamily="2" charset="-78"/>
                 <a:cs typeface="Amiri" pitchFamily="2" charset="-78"/>
               </a:rPr>
               <a:t>مَتَى يَبْدَأُ يَوْمُكَ الدِّرَاسِيُّ؟</a:t>
@@ -16502,6 +16630,7 @@
                   <a:srgbClr val="1B3B6F"/>
                 </a:solidFill>
                 <a:latin typeface="Amiri" pitchFamily="2" charset="-78"/>
+                <a:ea typeface="Amiri" pitchFamily="2" charset="-78"/>
                 <a:cs typeface="Amiri" pitchFamily="2" charset="-78"/>
               </a:rPr>
               <a:t>عِنْدِي … حِصَصٍ</a:t>
@@ -16578,6 +16707,7 @@
                   <a:srgbClr val="1B3B6F"/>
                 </a:solidFill>
                 <a:latin typeface="Amiri" pitchFamily="2" charset="-78"/>
+                <a:ea typeface="Amiri" pitchFamily="2" charset="-78"/>
                 <a:cs typeface="Amiri" pitchFamily="2" charset="-78"/>
               </a:rPr>
               <a:t>كَمْ حِصَّةً عِنْدَكَ كُلَّ يَوْمٍ؟</a:t>
@@ -16746,6 +16876,7 @@
                   <a:srgbClr val="1B3B6F"/>
                 </a:solidFill>
                 <a:latin typeface="Amiri" pitchFamily="2" charset="-78"/>
+                <a:ea typeface="Amiri" pitchFamily="2" charset="-78"/>
                 <a:cs typeface="Amiri" pitchFamily="2" charset="-78"/>
               </a:rPr>
               <a:t>المَادَّةُ الصَّعْبَةُ … هِيَ …</a:t>
@@ -16822,6 +16953,7 @@
                   <a:srgbClr val="1B3B6F"/>
                 </a:solidFill>
                 <a:latin typeface="Amiri" pitchFamily="2" charset="-78"/>
+                <a:ea typeface="Amiri" pitchFamily="2" charset="-78"/>
                 <a:cs typeface="Amiri" pitchFamily="2" charset="-78"/>
               </a:rPr>
               <a:t>مَا المَادَّةُ الصَّعْبَةُ عَلَيْكَ؟</a:t>
@@ -16976,6 +17108,7 @@
                   <a:srgbClr val="1B3B6F"/>
                 </a:solidFill>
                 <a:latin typeface="Amiri" pitchFamily="2" charset="-78"/>
+                <a:ea typeface="Amiri" pitchFamily="2" charset="-78"/>
                 <a:cs typeface="Amiri" pitchFamily="2" charset="-78"/>
               </a:rPr>
               <a:t>عَفْوًا، هَلْ يُمْكِنُ أَنْ تُعِيدَ السُّؤَالَ؟</a:t>
@@ -17109,6 +17242,7 @@
                   <a:srgbClr val="D4AF37"/>
                 </a:solidFill>
                 <a:latin typeface="Amiri" pitchFamily="2" charset="-78"/>
+                <a:ea typeface="Amiri" pitchFamily="2" charset="-78"/>
                 <a:cs typeface="Amiri" pitchFamily="2" charset="-78"/>
               </a:rPr>
               <a:t>م</a:t>
@@ -17429,6 +17563,7 @@
                   <a:srgbClr val="8A6D1E"/>
                 </a:solidFill>
                 <a:latin typeface="Amiri" pitchFamily="2" charset="-78"/>
+                <a:ea typeface="Amiri" pitchFamily="2" charset="-78"/>
                 <a:cs typeface="Amiri" pitchFamily="2" charset="-78"/>
               </a:rPr>
               <a:t>الجَدْوَلُ وَالتَّفْضِيلَاتُ</a:t>
@@ -17709,6 +17844,7 @@
                   <a:srgbClr val="1B3B6F"/>
                 </a:solidFill>
                 <a:latin typeface="Amiri" pitchFamily="2" charset="-78"/>
+                <a:ea typeface="Amiri" pitchFamily="2" charset="-78"/>
                 <a:cs typeface="Amiri" pitchFamily="2" charset="-78"/>
               </a:rPr>
               <a:t>يَبْدَأُ … ثُمَّ … وَيَنْتَهِي …</a:t>
@@ -17785,6 +17921,7 @@
                   <a:srgbClr val="1B3B6F"/>
                 </a:solidFill>
                 <a:latin typeface="Amiri" pitchFamily="2" charset="-78"/>
+                <a:ea typeface="Amiri" pitchFamily="2" charset="-78"/>
                 <a:cs typeface="Amiri" pitchFamily="2" charset="-78"/>
               </a:rPr>
               <a:t>صِفْ يَوْمًا دِرَاسِيًّا عَادِيًّا.</a:t>
@@ -17888,6 +18025,7 @@
                   <a:srgbClr val="1B3B6F"/>
                 </a:solidFill>
                 <a:latin typeface="Amiri" pitchFamily="2" charset="-78"/>
+                <a:ea typeface="Amiri" pitchFamily="2" charset="-78"/>
                 <a:cs typeface="Amiri" pitchFamily="2" charset="-78"/>
               </a:rPr>
               <a:t>… أَسْهَلُ مِنْ … لٰكِنَّ …</a:t>
@@ -17964,6 +18102,7 @@
                   <a:srgbClr val="1B3B6F"/>
                 </a:solidFill>
                 <a:latin typeface="Amiri" pitchFamily="2" charset="-78"/>
+                <a:ea typeface="Amiri" pitchFamily="2" charset="-78"/>
                 <a:cs typeface="Amiri" pitchFamily="2" charset="-78"/>
               </a:rPr>
               <a:t>قَارِنْ بَيْنَ مَادَّتَيْنِ.</a:t>
@@ -18067,6 +18206,7 @@
                   <a:srgbClr val="1B3B6F"/>
                 </a:solidFill>
                 <a:latin typeface="Amiri" pitchFamily="2" charset="-78"/>
+                <a:ea typeface="Amiri" pitchFamily="2" charset="-78"/>
                 <a:cs typeface="Amiri" pitchFamily="2" charset="-78"/>
               </a:rPr>
               <a:t>كُنْتُ أُحِبُّ … أَمَّا الآنَ …</a:t>
@@ -18143,6 +18283,7 @@
                   <a:srgbClr val="1B3B6F"/>
                 </a:solidFill>
                 <a:latin typeface="Amiri" pitchFamily="2" charset="-78"/>
+                <a:ea typeface="Amiri" pitchFamily="2" charset="-78"/>
                 <a:cs typeface="Amiri" pitchFamily="2" charset="-78"/>
               </a:rPr>
               <a:t>هَلْ تَغَيَّرَتْ مَادَّتُكَ المُفَضَّلَةُ؟</a:t>
@@ -18246,6 +18387,7 @@
                   <a:srgbClr val="1B3B6F"/>
                 </a:solidFill>
                 <a:latin typeface="Amiri" pitchFamily="2" charset="-78"/>
+                <a:ea typeface="Amiri" pitchFamily="2" charset="-78"/>
                 <a:cs typeface="Amiri" pitchFamily="2" charset="-78"/>
               </a:rPr>
               <a:t>أَرَاهَا مُفِيدَةً لِأَنَّ … لٰكِنَّ …</a:t>
@@ -18322,6 +18464,7 @@
                   <a:srgbClr val="1B3B6F"/>
                 </a:solidFill>
                 <a:latin typeface="Amiri" pitchFamily="2" charset="-78"/>
+                <a:ea typeface="Amiri" pitchFamily="2" charset="-78"/>
                 <a:cs typeface="Amiri" pitchFamily="2" charset="-78"/>
               </a:rPr>
               <a:t>مَا رَأْيُكَ فِي الوَاجِبَاتِ المَنْزِلِيَّةِ؟</a:t>
@@ -18425,6 +18568,7 @@
                   <a:srgbClr val="1B3B6F"/>
                 </a:solidFill>
                 <a:latin typeface="Amiri" pitchFamily="2" charset="-78"/>
+                <a:ea typeface="Amiri" pitchFamily="2" charset="-78"/>
                 <a:cs typeface="Amiri" pitchFamily="2" charset="-78"/>
               </a:rPr>
               <a:t>سَأَدْرُسُ … لِأَنِّي أُرِيدُ أَنْ …</a:t>
@@ -18501,6 +18645,7 @@
                   <a:srgbClr val="1B3B6F"/>
                 </a:solidFill>
                 <a:latin typeface="Amiri" pitchFamily="2" charset="-78"/>
+                <a:ea typeface="Amiri" pitchFamily="2" charset="-78"/>
                 <a:cs typeface="Amiri" pitchFamily="2" charset="-78"/>
               </a:rPr>
               <a:t>أَيَّ مَوَادَّ سَتَدْرُسُ السَّنَةَ القَادِمَةَ؟</a:t>
@@ -18710,6 +18855,7 @@
                   <a:srgbClr val="D4AF37"/>
                 </a:solidFill>
                 <a:latin typeface="Amiri" pitchFamily="2" charset="-78"/>
+                <a:ea typeface="Amiri" pitchFamily="2" charset="-78"/>
                 <a:cs typeface="Amiri" pitchFamily="2" charset="-78"/>
               </a:rPr>
               <a:t>م</a:t>
@@ -19030,6 +19176,7 @@
                   <a:srgbClr val="8A6D1E"/>
                 </a:solidFill>
                 <a:latin typeface="Amiri" pitchFamily="2" charset="-78"/>
+                <a:ea typeface="Amiri" pitchFamily="2" charset="-78"/>
                 <a:cs typeface="Amiri" pitchFamily="2" charset="-78"/>
               </a:rPr>
               <a:t>المَدْرَسَةُ وَالمُسْتَقْبَلُ</a:t>
@@ -19310,6 +19457,7 @@
                   <a:srgbClr val="1B3B6F"/>
                 </a:solidFill>
                 <a:latin typeface="Amiri" pitchFamily="2" charset="-78"/>
+                <a:ea typeface="Amiri" pitchFamily="2" charset="-78"/>
                 <a:cs typeface="Amiri" pitchFamily="2" charset="-78"/>
               </a:rPr>
               <a:t>مِنْ نَاحِيَةٍ … وَمِنْ نَاحِيَةٍ أُخْرَى …</a:t>
@@ -19386,6 +19534,7 @@
                   <a:srgbClr val="1B3B6F"/>
                 </a:solidFill>
                 <a:latin typeface="Amiri" pitchFamily="2" charset="-78"/>
+                <a:ea typeface="Amiri" pitchFamily="2" charset="-78"/>
                 <a:cs typeface="Amiri" pitchFamily="2" charset="-78"/>
               </a:rPr>
               <a:t>هَلْ يَجِبُ أَنْ يَخْتَارَ الطُّلَّابُ كُلَّ مَوَادِّهِمْ؟</a:t>
@@ -19489,6 +19638,7 @@
                   <a:srgbClr val="1B3B6F"/>
                 </a:solidFill>
                 <a:latin typeface="Amiri" pitchFamily="2" charset="-78"/>
+                <a:ea typeface="Amiri" pitchFamily="2" charset="-78"/>
                 <a:cs typeface="Amiri" pitchFamily="2" charset="-78"/>
               </a:rPr>
               <a:t>صَحِيحٌ أَنَّ … غَيْرَ أَنَّ …</a:t>
@@ -19565,6 +19715,7 @@
                   <a:srgbClr val="1B3B6F"/>
                 </a:solidFill>
                 <a:latin typeface="Amiri" pitchFamily="2" charset="-78"/>
+                <a:ea typeface="Amiri" pitchFamily="2" charset="-78"/>
                 <a:cs typeface="Amiri" pitchFamily="2" charset="-78"/>
               </a:rPr>
               <a:t>هَلِ المَوَادُّ الفَنِّيَّةُ أَقَلُّ أَهَمِّيَّةً؟</a:t>
@@ -19668,6 +19819,7 @@
                   <a:srgbClr val="1B3B6F"/>
                 </a:solidFill>
                 <a:latin typeface="Amiri" pitchFamily="2" charset="-78"/>
+                <a:ea typeface="Amiri" pitchFamily="2" charset="-78"/>
                 <a:cs typeface="Amiri" pitchFamily="2" charset="-78"/>
               </a:rPr>
               <a:t>كَانُوا يَدْرُسُونَ … أَمَّا نَحْنُ فَنَتَعَلَّمُ …</a:t>
@@ -19744,6 +19896,7 @@
                   <a:srgbClr val="1B3B6F"/>
                 </a:solidFill>
                 <a:latin typeface="Amiri" pitchFamily="2" charset="-78"/>
+                <a:ea typeface="Amiri" pitchFamily="2" charset="-78"/>
                 <a:cs typeface="Amiri" pitchFamily="2" charset="-78"/>
               </a:rPr>
               <a:t>كَيْفَ كَانَتِ المَوَادُّ فِي مَدْرَسَةِ وَالِدَيْكَ؟</a:t>
@@ -19847,6 +20000,7 @@
                   <a:srgbClr val="1B3B6F"/>
                 </a:solidFill>
                 <a:latin typeface="Amiri" pitchFamily="2" charset="-78"/>
+                <a:ea typeface="Amiri" pitchFamily="2" charset="-78"/>
                 <a:cs typeface="Amiri" pitchFamily="2" charset="-78"/>
               </a:rPr>
               <a:t>أَقْتَرِحُ أَنْ تُضَافَ … لِأَنَّ …</a:t>
@@ -19923,6 +20077,7 @@
                   <a:srgbClr val="1B3B6F"/>
                 </a:solidFill>
                 <a:latin typeface="Amiri" pitchFamily="2" charset="-78"/>
+                <a:ea typeface="Amiri" pitchFamily="2" charset="-78"/>
                 <a:cs typeface="Amiri" pitchFamily="2" charset="-78"/>
               </a:rPr>
               <a:t>مَا المَادَّةُ الَّتِي يَجِبُ أَنْ تُضَافَ إِلَى الجَدْوَلِ؟</a:t>
@@ -20026,6 +20181,7 @@
                   <a:srgbClr val="1B3B6F"/>
                 </a:solidFill>
                 <a:latin typeface="Amiri" pitchFamily="2" charset="-78"/>
+                <a:ea typeface="Amiri" pitchFamily="2" charset="-78"/>
                 <a:cs typeface="Amiri" pitchFamily="2" charset="-78"/>
               </a:rPr>
               <a:t>لَوْ لَمْ تَكُنْ هُنَاكَ امْتِحَانَاتٌ، لَدَرَسْتُ …</a:t>
@@ -20102,6 +20258,7 @@
                   <a:srgbClr val="1B3B6F"/>
                 </a:solidFill>
                 <a:latin typeface="Amiri" pitchFamily="2" charset="-78"/>
+                <a:ea typeface="Amiri" pitchFamily="2" charset="-78"/>
                 <a:cs typeface="Amiri" pitchFamily="2" charset="-78"/>
               </a:rPr>
               <a:t>لَوْ لَمْ تَكُنْ هُنَاكَ امْتِحَانَاتٌ، هَلْ تَدْرُسُ المَوَادَّ نَفْسَهَا؟</a:t>
@@ -20311,6 +20468,7 @@
                   <a:srgbClr val="D4AF37"/>
                 </a:solidFill>
                 <a:latin typeface="Amiri" pitchFamily="2" charset="-78"/>
+                <a:ea typeface="Amiri" pitchFamily="2" charset="-78"/>
                 <a:cs typeface="Amiri" pitchFamily="2" charset="-78"/>
               </a:rPr>
               <a:t>م</a:t>
@@ -20631,6 +20789,7 @@
                   <a:srgbClr val="8A6D1E"/>
                 </a:solidFill>
                 <a:latin typeface="Amiri" pitchFamily="2" charset="-78"/>
+                <a:ea typeface="Amiri" pitchFamily="2" charset="-78"/>
                 <a:cs typeface="Amiri" pitchFamily="2" charset="-78"/>
               </a:rPr>
               <a:t>آدَابُ الصَّفِّ</a:t>
@@ -22162,6 +22321,7 @@
                   <a:srgbClr val="D4AF37"/>
                 </a:solidFill>
                 <a:latin typeface="Amiri" pitchFamily="2" charset="-78"/>
+                <a:ea typeface="Amiri" pitchFamily="2" charset="-78"/>
                 <a:cs typeface="Amiri" pitchFamily="2" charset="-78"/>
               </a:rPr>
               <a:t>م</a:t>
@@ -22482,6 +22642,7 @@
                   <a:srgbClr val="8A6D1E"/>
                 </a:solidFill>
                 <a:latin typeface="Amiri" pitchFamily="2" charset="-78"/>
+                <a:ea typeface="Amiri" pitchFamily="2" charset="-78"/>
                 <a:cs typeface="Amiri" pitchFamily="2" charset="-78"/>
               </a:rPr>
               <a:t>نَمُوذَجُ الإِجَابَةِ</a:t>
@@ -22724,6 +22885,7 @@
                   <a:srgbClr val="1B3B6F"/>
                 </a:solidFill>
                 <a:latin typeface="Amiri" pitchFamily="2" charset="-78"/>
+                <a:ea typeface="Amiri" pitchFamily="2" charset="-78"/>
                 <a:cs typeface="Amiri" pitchFamily="2" charset="-78"/>
               </a:rPr>
               <a:t>مَادَّتِيَ المُفَضَّلَةُ التَّارِيخُ.</a:t>
@@ -22800,6 +22962,7 @@
                   <a:srgbClr val="1B3B6F"/>
                 </a:solidFill>
                 <a:latin typeface="Amiri" pitchFamily="2" charset="-78"/>
+                <a:ea typeface="Amiri" pitchFamily="2" charset="-78"/>
                 <a:cs typeface="Amiri" pitchFamily="2" charset="-78"/>
               </a:rPr>
               <a:t>مَا مَادَّتُكَ المُفَضَّلَةُ؟</a:t>
@@ -22903,6 +23066,7 @@
                   <a:srgbClr val="1B3B6F"/>
                 </a:solidFill>
                 <a:latin typeface="Amiri" pitchFamily="2" charset="-78"/>
+                <a:ea typeface="Amiri" pitchFamily="2" charset="-78"/>
                 <a:cs typeface="Amiri" pitchFamily="2" charset="-78"/>
               </a:rPr>
               <a:t>لِأَنَّهُ مُمْتِعٌ، وَأَتَعَلَّمُ عَنِ المَاضِي.</a:t>
@@ -22979,6 +23143,7 @@
                   <a:srgbClr val="1B3B6F"/>
                 </a:solidFill>
                 <a:latin typeface="Amiri" pitchFamily="2" charset="-78"/>
+                <a:ea typeface="Amiri" pitchFamily="2" charset="-78"/>
                 <a:cs typeface="Amiri" pitchFamily="2" charset="-78"/>
               </a:rPr>
               <a:t>لِمَاذَا تُحِبُّهَا؟</a:t>
@@ -23082,6 +23247,7 @@
                   <a:srgbClr val="1B3B6F"/>
                 </a:solidFill>
                 <a:latin typeface="Amiri" pitchFamily="2" charset="-78"/>
+                <a:ea typeface="Amiri" pitchFamily="2" charset="-78"/>
                 <a:cs typeface="Amiri" pitchFamily="2" charset="-78"/>
               </a:rPr>
               <a:t>يَبْدَأُ فِي السَّاعَةِ الثَّامِنَةِ وَالرُّبْعِ.</a:t>
@@ -23158,6 +23324,7 @@
                   <a:srgbClr val="1B3B6F"/>
                 </a:solidFill>
                 <a:latin typeface="Amiri" pitchFamily="2" charset="-78"/>
+                <a:ea typeface="Amiri" pitchFamily="2" charset="-78"/>
                 <a:cs typeface="Amiri" pitchFamily="2" charset="-78"/>
               </a:rPr>
               <a:t>مَتَى يَبْدَأُ يَوْمُكَ الدِّرَاسِيُّ؟</a:t>
@@ -23261,6 +23428,7 @@
                   <a:srgbClr val="1B3B6F"/>
                 </a:solidFill>
                 <a:latin typeface="Amiri" pitchFamily="2" charset="-78"/>
+                <a:ea typeface="Amiri" pitchFamily="2" charset="-78"/>
                 <a:cs typeface="Amiri" pitchFamily="2" charset="-78"/>
               </a:rPr>
               <a:t>عِنْدِي سِتُّ حِصَصٍ كُلَّ يَوْمٍ.</a:t>
@@ -23337,6 +23505,7 @@
                   <a:srgbClr val="1B3B6F"/>
                 </a:solidFill>
                 <a:latin typeface="Amiri" pitchFamily="2" charset="-78"/>
+                <a:ea typeface="Amiri" pitchFamily="2" charset="-78"/>
                 <a:cs typeface="Amiri" pitchFamily="2" charset="-78"/>
               </a:rPr>
               <a:t>كَمْ حِصَّةً عِنْدَكَ كُلَّ يَوْمٍ؟</a:t>
@@ -23440,6 +23609,7 @@
                   <a:srgbClr val="1B3B6F"/>
                 </a:solidFill>
                 <a:latin typeface="Amiri" pitchFamily="2" charset="-78"/>
+                <a:ea typeface="Amiri" pitchFamily="2" charset="-78"/>
                 <a:cs typeface="Amiri" pitchFamily="2" charset="-78"/>
               </a:rPr>
               <a:t>المَادَّةُ الصَّعْبَةُ عَلَيَّ هِيَ الفِيزْيَاءُ.</a:t>
@@ -23516,6 +23686,7 @@
                   <a:srgbClr val="1B3B6F"/>
                 </a:solidFill>
                 <a:latin typeface="Amiri" pitchFamily="2" charset="-78"/>
+                <a:ea typeface="Amiri" pitchFamily="2" charset="-78"/>
                 <a:cs typeface="Amiri" pitchFamily="2" charset="-78"/>
               </a:rPr>
               <a:t>مَا المَادَّةُ الصَّعْبَةُ عَلَيْكَ؟</a:t>
@@ -23725,6 +23896,7 @@
                   <a:srgbClr val="D4AF37"/>
                 </a:solidFill>
                 <a:latin typeface="Amiri" pitchFamily="2" charset="-78"/>
+                <a:ea typeface="Amiri" pitchFamily="2" charset="-78"/>
                 <a:cs typeface="Amiri" pitchFamily="2" charset="-78"/>
               </a:rPr>
               <a:t>م</a:t>
@@ -24045,6 +24217,7 @@
                   <a:srgbClr val="8A6D1E"/>
                 </a:solidFill>
                 <a:latin typeface="Amiri" pitchFamily="2" charset="-78"/>
+                <a:ea typeface="Amiri" pitchFamily="2" charset="-78"/>
                 <a:cs typeface="Amiri" pitchFamily="2" charset="-78"/>
               </a:rPr>
               <a:t>نَمُوذَجُ الإِجَابَةِ</a:t>
@@ -24287,6 +24460,7 @@
                   <a:srgbClr val="1B3B6F"/>
                 </a:solidFill>
                 <a:latin typeface="Amiri" pitchFamily="2" charset="-78"/>
+                <a:ea typeface="Amiri" pitchFamily="2" charset="-78"/>
                 <a:cs typeface="Amiri" pitchFamily="2" charset="-78"/>
               </a:rPr>
               <a:t>يَبْدَأُ يَوْمِي فِي الثَّامِنَةِ وَالنِّصْفِ بِحِصَّةِ الرِّيَاضِيَّاتِ، ثُمَّ العُلُومِ، وَبَعْدَ الغَدَاءِ عِنْدَنَا التَّارِيخُ، وَيَنْتَهِي اليَوْمُ فِي الثَّالِثَةِ.</a:t>
@@ -24363,6 +24537,7 @@
                   <a:srgbClr val="1B3B6F"/>
                 </a:solidFill>
                 <a:latin typeface="Amiri" pitchFamily="2" charset="-78"/>
+                <a:ea typeface="Amiri" pitchFamily="2" charset="-78"/>
                 <a:cs typeface="Amiri" pitchFamily="2" charset="-78"/>
               </a:rPr>
               <a:t>صِفْ يَوْمًا دِرَاسِيًّا عَادِيًّا.</a:t>
@@ -24466,6 +24641,7 @@
                   <a:srgbClr val="1B3B6F"/>
                 </a:solidFill>
                 <a:latin typeface="Amiri" pitchFamily="2" charset="-78"/>
+                <a:ea typeface="Amiri" pitchFamily="2" charset="-78"/>
                 <a:cs typeface="Amiri" pitchFamily="2" charset="-78"/>
               </a:rPr>
               <a:t>الجُغْرَافْيَا أَسْهَلُ مِنَ الكِيمْيَاءِ، لٰكِنَّ الكِيمْيَاءَ أَكْثَرُ فَائِدَةً لِمُسْتَقْبَلِي.</a:t>
@@ -24542,6 +24718,7 @@
                   <a:srgbClr val="1B3B6F"/>
                 </a:solidFill>
                 <a:latin typeface="Amiri" pitchFamily="2" charset="-78"/>
+                <a:ea typeface="Amiri" pitchFamily="2" charset="-78"/>
                 <a:cs typeface="Amiri" pitchFamily="2" charset="-78"/>
               </a:rPr>
               <a:t>قَارِنْ بَيْنَ مَادَّتَيْنِ.</a:t>
@@ -24645,6 +24822,7 @@
                   <a:srgbClr val="1B3B6F"/>
                 </a:solidFill>
                 <a:latin typeface="Amiri" pitchFamily="2" charset="-78"/>
+                <a:ea typeface="Amiri" pitchFamily="2" charset="-78"/>
                 <a:cs typeface="Amiri" pitchFamily="2" charset="-78"/>
               </a:rPr>
               <a:t>كُنْتُ أُحِبُّ الرَّسْمَ فِي الابْتِدَائِيَّةِ، أَمَّا الآنَ فَأُفَضِّلُ العُلُومَ، لِأَنَّ التَّجَارِبَ مُدْهِشَةٌ.</a:t>
@@ -24721,6 +24899,7 @@
                   <a:srgbClr val="1B3B6F"/>
                 </a:solidFill>
                 <a:latin typeface="Amiri" pitchFamily="2" charset="-78"/>
+                <a:ea typeface="Amiri" pitchFamily="2" charset="-78"/>
                 <a:cs typeface="Amiri" pitchFamily="2" charset="-78"/>
               </a:rPr>
               <a:t>هَلْ تَغَيَّرَتْ مَادَّتُكَ المُفَضَّلَةُ؟</a:t>
@@ -24824,6 +25003,7 @@
                   <a:srgbClr val="1B3B6F"/>
                 </a:solidFill>
                 <a:latin typeface="Amiri" pitchFamily="2" charset="-78"/>
+                <a:ea typeface="Amiri" pitchFamily="2" charset="-78"/>
                 <a:cs typeface="Amiri" pitchFamily="2" charset="-78"/>
               </a:rPr>
               <a:t>أَرَاهَا مُفِيدَةً لِأَنَّهَا تُسَاعِدُنَا عَلَى المُرَاجَعَةِ، لٰكِنَّهَا أَحْيَانًا كَثِيرَةٌ جِدًّا.</a:t>
@@ -24900,6 +25080,7 @@
                   <a:srgbClr val="1B3B6F"/>
                 </a:solidFill>
                 <a:latin typeface="Amiri" pitchFamily="2" charset="-78"/>
+                <a:ea typeface="Amiri" pitchFamily="2" charset="-78"/>
                 <a:cs typeface="Amiri" pitchFamily="2" charset="-78"/>
               </a:rPr>
               <a:t>مَا رَأْيُكَ فِي الوَاجِبَاتِ المَنْزِلِيَّةِ؟</a:t>
@@ -25003,6 +25184,7 @@
                   <a:srgbClr val="1B3B6F"/>
                 </a:solidFill>
                 <a:latin typeface="Amiri" pitchFamily="2" charset="-78"/>
+                <a:ea typeface="Amiri" pitchFamily="2" charset="-78"/>
                 <a:cs typeface="Amiri" pitchFamily="2" charset="-78"/>
               </a:rPr>
               <a:t>سَأَدْرُسُ الأَحْيَاءَ وَالكِيمْيَاءَ وَالعَرَبِيَّةَ، لِأَنِّي أُرِيدُ أَنْ أَدْرُسَ الصَّيْدَلَةَ.</a:t>
@@ -25079,6 +25261,7 @@
                   <a:srgbClr val="1B3B6F"/>
                 </a:solidFill>
                 <a:latin typeface="Amiri" pitchFamily="2" charset="-78"/>
+                <a:ea typeface="Amiri" pitchFamily="2" charset="-78"/>
                 <a:cs typeface="Amiri" pitchFamily="2" charset="-78"/>
               </a:rPr>
               <a:t>أَيَّ مَوَادَّ سَتَدْرُسُ السَّنَةَ القَادِمَةَ؟</a:t>
@@ -25288,6 +25471,7 @@
                   <a:srgbClr val="D4AF37"/>
                 </a:solidFill>
                 <a:latin typeface="Amiri" pitchFamily="2" charset="-78"/>
+                <a:ea typeface="Amiri" pitchFamily="2" charset="-78"/>
                 <a:cs typeface="Amiri" pitchFamily="2" charset="-78"/>
               </a:rPr>
               <a:t>م</a:t>
@@ -25608,6 +25792,7 @@
                   <a:srgbClr val="8A6D1E"/>
                 </a:solidFill>
                 <a:latin typeface="Amiri" pitchFamily="2" charset="-78"/>
+                <a:ea typeface="Amiri" pitchFamily="2" charset="-78"/>
                 <a:cs typeface="Amiri" pitchFamily="2" charset="-78"/>
               </a:rPr>
               <a:t>نَمُوذَجُ الإِجَابَةِ</a:t>
@@ -25850,6 +26035,7 @@
                   <a:srgbClr val="1B3B6F"/>
                 </a:solidFill>
                 <a:latin typeface="Amiri" pitchFamily="2" charset="-78"/>
+                <a:ea typeface="Amiri" pitchFamily="2" charset="-78"/>
                 <a:cs typeface="Amiri" pitchFamily="2" charset="-78"/>
               </a:rPr>
               <a:t>مِنْ نَاحِيَةٍ، يَزِيدُ الاخْتِيَارُ حَمَاسَهُمْ، وَمِنْ نَاحِيَةٍ أُخْرَى، يَحْتَاجُ الجَمِيعُ إِلَى أَسَاسٍ فِي الرِّيَاضِيَّاتِ وَاللُّغَةِ.</a:t>
@@ -25926,6 +26112,7 @@
                   <a:srgbClr val="1B3B6F"/>
                 </a:solidFill>
                 <a:latin typeface="Amiri" pitchFamily="2" charset="-78"/>
+                <a:ea typeface="Amiri" pitchFamily="2" charset="-78"/>
                 <a:cs typeface="Amiri" pitchFamily="2" charset="-78"/>
               </a:rPr>
               <a:t>هَلْ يَجِبُ أَنْ يَخْتَارَ الطُّلَّابُ كُلَّ مَوَادِّهِمْ؟</a:t>
@@ -26029,6 +26216,7 @@
                   <a:srgbClr val="1B3B6F"/>
                 </a:solidFill>
                 <a:latin typeface="Amiri" pitchFamily="2" charset="-78"/>
+                <a:ea typeface="Amiri" pitchFamily="2" charset="-78"/>
                 <a:cs typeface="Amiri" pitchFamily="2" charset="-78"/>
               </a:rPr>
               <a:t>صَحِيحٌ أَنَّ بَعْضَ النَّاسِ يَرَوْنَهَا تَرْفِيهًا، غَيْرَ أَنَّهَا تُنَمِّي الإِبْدَاعَ الَّذِي تَحْتَاجُ إِلَيْهِ كُلُّ مِهْنَةٍ.</a:t>
@@ -26105,6 +26293,7 @@
                   <a:srgbClr val="1B3B6F"/>
                 </a:solidFill>
                 <a:latin typeface="Amiri" pitchFamily="2" charset="-78"/>
+                <a:ea typeface="Amiri" pitchFamily="2" charset="-78"/>
                 <a:cs typeface="Amiri" pitchFamily="2" charset="-78"/>
               </a:rPr>
               <a:t>هَلِ المَوَادُّ الفَنِّيَّةُ أَقَلُّ أَهَمِّيَّةً؟</a:t>
@@ -26208,6 +26397,7 @@
                   <a:srgbClr val="1B3B6F"/>
                 </a:solidFill>
                 <a:latin typeface="Amiri" pitchFamily="2" charset="-78"/>
+                <a:ea typeface="Amiri" pitchFamily="2" charset="-78"/>
                 <a:cs typeface="Amiri" pitchFamily="2" charset="-78"/>
               </a:rPr>
               <a:t>كَانُوا يَدْرُسُونَ مَوَادَّ أَقَلَّ، وَلَمْ تَكُنْ هُنَاكَ حِصَّةٌ لِلْحَاسُوبِ، أَمَّا نَحْنُ فَنَتَعَلَّمُ البَرْمَجَةَ مُنْذُ الصَّفِّ السَّابِعِ.</a:t>
@@ -26284,6 +26474,7 @@
                   <a:srgbClr val="1B3B6F"/>
                 </a:solidFill>
                 <a:latin typeface="Amiri" pitchFamily="2" charset="-78"/>
+                <a:ea typeface="Amiri" pitchFamily="2" charset="-78"/>
                 <a:cs typeface="Amiri" pitchFamily="2" charset="-78"/>
               </a:rPr>
               <a:t>كَيْفَ كَانَتِ المَوَادُّ فِي مَدْرَسَةِ وَالِدَيْكَ؟</a:t>
@@ -26493,6 +26684,7 @@
                   <a:srgbClr val="D4AF37"/>
                 </a:solidFill>
                 <a:latin typeface="Amiri" pitchFamily="2" charset="-78"/>
+                <a:ea typeface="Amiri" pitchFamily="2" charset="-78"/>
                 <a:cs typeface="Amiri" pitchFamily="2" charset="-78"/>
               </a:rPr>
               <a:t>م</a:t>
@@ -26813,6 +27005,7 @@
                   <a:srgbClr val="8A6D1E"/>
                 </a:solidFill>
                 <a:latin typeface="Amiri" pitchFamily="2" charset="-78"/>
+                <a:ea typeface="Amiri" pitchFamily="2" charset="-78"/>
                 <a:cs typeface="Amiri" pitchFamily="2" charset="-78"/>
               </a:rPr>
               <a:t>نَمُوذَجُ الإِجَابَةِ</a:t>
@@ -27055,6 +27248,7 @@
                   <a:srgbClr val="1B3B6F"/>
                 </a:solidFill>
                 <a:latin typeface="Amiri" pitchFamily="2" charset="-78"/>
+                <a:ea typeface="Amiri" pitchFamily="2" charset="-78"/>
                 <a:cs typeface="Amiri" pitchFamily="2" charset="-78"/>
               </a:rPr>
               <a:t>أَقْتَرِحُ أَنْ تُضَافَ مَادَّةٌ لِلثَّقَافَةِ المَالِيَّةِ، لِأَنَّ كَثِيرًا مِنَ الشَّبَابِ لَا يَعْرِفُونَ كَيْفَ يُدِيرُونَ أَمْوَالَهُمْ.</a:t>
@@ -27131,6 +27325,7 @@
                   <a:srgbClr val="1B3B6F"/>
                 </a:solidFill>
                 <a:latin typeface="Amiri" pitchFamily="2" charset="-78"/>
+                <a:ea typeface="Amiri" pitchFamily="2" charset="-78"/>
                 <a:cs typeface="Amiri" pitchFamily="2" charset="-78"/>
               </a:rPr>
               <a:t>مَا المَادَّةُ الَّتِي يَجِبُ أَنْ تُضَافَ إِلَى الجَدْوَلِ؟</a:t>
@@ -27234,6 +27429,7 @@
                   <a:srgbClr val="1B3B6F"/>
                 </a:solidFill>
                 <a:latin typeface="Amiri" pitchFamily="2" charset="-78"/>
+                <a:ea typeface="Amiri" pitchFamily="2" charset="-78"/>
                 <a:cs typeface="Amiri" pitchFamily="2" charset="-78"/>
               </a:rPr>
               <a:t>لَوْ لَمْ تَكُنْ هُنَاكَ امْتِحَانَاتٌ، لَدَرَسْتُ التَّارِيخَ وَالعَرَبِيَّةَ أَكْثَرَ، لِأَنِّي أَدْرُسُهُمَا لِلْمُتْعَةِ لَا لِلدَّرَجَاتِ.</a:t>
@@ -27313,6 +27509,7 @@
                   <a:srgbClr val="1B3B6F"/>
                 </a:solidFill>
                 <a:latin typeface="Amiri" pitchFamily="2" charset="-78"/>
+                <a:ea typeface="Amiri" pitchFamily="2" charset="-78"/>
                 <a:cs typeface="Amiri" pitchFamily="2" charset="-78"/>
               </a:rPr>
               <a:t>لَوْ لَمْ تَكُنْ هُنَاكَ امْتِحَانَاتٌ، هَلْ تَدْرُسُ المَوَادَّ نَفْسَهَا؟</a:t>
@@ -27522,6 +27719,7 @@
                   <a:srgbClr val="D4AF37"/>
                 </a:solidFill>
                 <a:latin typeface="Amiri" pitchFamily="2" charset="-78"/>
+                <a:ea typeface="Amiri" pitchFamily="2" charset="-78"/>
                 <a:cs typeface="Amiri" pitchFamily="2" charset="-78"/>
               </a:rPr>
               <a:t>م</a:t>
@@ -27842,6 +28040,7 @@
                   <a:srgbClr val="8A6D1E"/>
                 </a:solidFill>
                 <a:latin typeface="Amiri" pitchFamily="2" charset="-78"/>
+                <a:ea typeface="Amiri" pitchFamily="2" charset="-78"/>
                 <a:cs typeface="Amiri" pitchFamily="2" charset="-78"/>
               </a:rPr>
               <a:t>قَيِّمْ عَمَلَكَ</a:t>
@@ -29086,6 +29285,7 @@
                   <a:srgbClr val="FFFFFF"/>
                 </a:solidFill>
                 <a:latin typeface="Amiri" pitchFamily="2" charset="-78"/>
+                <a:ea typeface="Amiri" pitchFamily="2" charset="-78"/>
                 <a:cs typeface="Amiri" pitchFamily="2" charset="-78"/>
               </a:rPr>
               <a:t>أَحْسَنْتُمْ! إِلَى اللِّقَاءِ</a:t>
@@ -29238,6 +29438,7 @@
                   <a:srgbClr val="D4AF37"/>
                 </a:solidFill>
                 <a:latin typeface="Amiri" pitchFamily="2" charset="-78"/>
+                <a:ea typeface="Amiri" pitchFamily="2" charset="-78"/>
                 <a:cs typeface="Amiri" pitchFamily="2" charset="-78"/>
               </a:rPr>
               <a:t>وَرْشَةُ الكِتَابَةِ</a:t>
@@ -29371,6 +29572,7 @@
                   <a:srgbClr val="D4AF37"/>
                 </a:solidFill>
                 <a:latin typeface="Amiri" pitchFamily="2" charset="-78"/>
+                <a:ea typeface="Amiri" pitchFamily="2" charset="-78"/>
                 <a:cs typeface="Amiri" pitchFamily="2" charset="-78"/>
               </a:rPr>
               <a:t>م</a:t>
@@ -29691,6 +29893,7 @@
                   <a:srgbClr val="8A6D1E"/>
                 </a:solidFill>
                 <a:latin typeface="Amiri" pitchFamily="2" charset="-78"/>
+                <a:ea typeface="Amiri" pitchFamily="2" charset="-78"/>
                 <a:cs typeface="Amiri" pitchFamily="2" charset="-78"/>
               </a:rPr>
               <a:t>خَرِيطَةُ الوَرْشَةِ</a:t>
@@ -30005,6 +30208,7 @@
                   <a:srgbClr val="1B3B6F"/>
                 </a:solidFill>
                 <a:latin typeface="Amiri" pitchFamily="2" charset="-78"/>
+                <a:ea typeface="Amiri" pitchFamily="2" charset="-78"/>
                 <a:cs typeface="Amiri" pitchFamily="2" charset="-78"/>
               </a:rPr>
               <a:t>كَيْفَ</a:t>
@@ -30281,6 +30485,7 @@
                   <a:srgbClr val="1E6B52"/>
                 </a:solidFill>
                 <a:latin typeface="Amiri" pitchFamily="2" charset="-78"/>
+                <a:ea typeface="Amiri" pitchFamily="2" charset="-78"/>
                 <a:cs typeface="Amiri" pitchFamily="2" charset="-78"/>
               </a:rPr>
               <a:t>تَمْثِيلُ الدَّوْرِ</a:t>
@@ -30557,6 +30762,7 @@
                   <a:srgbClr val="8A6D1E"/>
                 </a:solidFill>
                 <a:latin typeface="Amiri" pitchFamily="2" charset="-78"/>
+                <a:ea typeface="Amiri" pitchFamily="2" charset="-78"/>
                 <a:cs typeface="Amiri" pitchFamily="2" charset="-78"/>
               </a:rPr>
               <a:t>النَّمُوذَجُ</a:t>
@@ -30833,6 +31039,7 @@
                   <a:srgbClr val="1E6B52"/>
                 </a:solidFill>
                 <a:latin typeface="Amiri" pitchFamily="2" charset="-78"/>
+                <a:ea typeface="Amiri" pitchFamily="2" charset="-78"/>
                 <a:cs typeface="Amiri" pitchFamily="2" charset="-78"/>
               </a:rPr>
               <a:t>المُحَادَثَةُ</a:t>
@@ -31109,6 +31316,7 @@
                   <a:srgbClr val="8A6D1E"/>
                 </a:solidFill>
                 <a:latin typeface="Amiri" pitchFamily="2" charset="-78"/>
+                <a:ea typeface="Amiri" pitchFamily="2" charset="-78"/>
                 <a:cs typeface="Amiri" pitchFamily="2" charset="-78"/>
               </a:rPr>
               <a:t>قَيِّمْ</a:t>
@@ -31352,6 +31560,7 @@
                   <a:srgbClr val="D4AF37"/>
                 </a:solidFill>
                 <a:latin typeface="Amiri" pitchFamily="2" charset="-78"/>
+                <a:ea typeface="Amiri" pitchFamily="2" charset="-78"/>
                 <a:cs typeface="Amiri" pitchFamily="2" charset="-78"/>
               </a:rPr>
               <a:t>م</a:t>
@@ -31672,6 +31881,7 @@
                   <a:srgbClr val="8A6D1E"/>
                 </a:solidFill>
                 <a:latin typeface="Amiri" pitchFamily="2" charset="-78"/>
+                <a:ea typeface="Amiri" pitchFamily="2" charset="-78"/>
                 <a:cs typeface="Amiri" pitchFamily="2" charset="-78"/>
               </a:rPr>
               <a:t>امْتِحَانُ التَّحَدُّثِ</a:t>
@@ -32296,6 +32506,7 @@
                   <a:srgbClr val="1B3B6F"/>
                 </a:solidFill>
                 <a:latin typeface="Amiri" pitchFamily="2" charset="-78"/>
+                <a:ea typeface="Amiri" pitchFamily="2" charset="-78"/>
                 <a:cs typeface="Amiri" pitchFamily="2" charset="-78"/>
               </a:rPr>
               <a:t>عَفْوًا، هَلْ يُمْكِنُ أَنْ تُعِيدَ السُّؤَالَ؟</a:t>
@@ -32395,6 +32606,7 @@
                   <a:srgbClr val="1B3B6F"/>
                 </a:solidFill>
                 <a:latin typeface="Amiri" pitchFamily="2" charset="-78"/>
+                <a:ea typeface="Amiri" pitchFamily="2" charset="-78"/>
                 <a:cs typeface="Amiri" pitchFamily="2" charset="-78"/>
               </a:rPr>
               <a:t>لَحْظَةً، دَعْنِي أُفَكِّرُ …</a:t>
@@ -32494,6 +32706,7 @@
                   <a:srgbClr val="1B3B6F"/>
                 </a:solidFill>
                 <a:latin typeface="Amiri" pitchFamily="2" charset="-78"/>
+                <a:ea typeface="Amiri" pitchFamily="2" charset="-78"/>
                 <a:cs typeface="Amiri" pitchFamily="2" charset="-78"/>
               </a:rPr>
               <a:t>أَقْصِدُ …</a:t>
@@ -32665,6 +32878,7 @@
                   <a:srgbClr val="D4AF37"/>
                 </a:solidFill>
                 <a:latin typeface="Amiri" pitchFamily="2" charset="-78"/>
+                <a:ea typeface="Amiri" pitchFamily="2" charset="-78"/>
                 <a:cs typeface="Amiri" pitchFamily="2" charset="-78"/>
               </a:rPr>
               <a:t>م</a:t>
@@ -32985,6 +33199,7 @@
                   <a:srgbClr val="8A6D1E"/>
                 </a:solidFill>
                 <a:latin typeface="Amiri" pitchFamily="2" charset="-78"/>
+                <a:ea typeface="Amiri" pitchFamily="2" charset="-78"/>
                 <a:cs typeface="Amiri" pitchFamily="2" charset="-78"/>
               </a:rPr>
               <a:t>المَوَادُّ الدِّرَاسِيَّةُ</a:t>
@@ -33288,6 +33503,7 @@
                   <a:srgbClr val="1B3B6F"/>
                 </a:solidFill>
                 <a:latin typeface="Amiri" pitchFamily="2" charset="-78"/>
+                <a:ea typeface="Amiri" pitchFamily="2" charset="-78"/>
                 <a:cs typeface="Amiri" pitchFamily="2" charset="-78"/>
               </a:rPr>
               <a:t>مَادَّةٌ</a:t>
@@ -33445,6 +33661,7 @@
                   <a:srgbClr val="1B3B6F"/>
                 </a:solidFill>
                 <a:latin typeface="Amiri" pitchFamily="2" charset="-78"/>
+                <a:ea typeface="Amiri" pitchFamily="2" charset="-78"/>
                 <a:cs typeface="Amiri" pitchFamily="2" charset="-78"/>
               </a:rPr>
               <a:t>مَادَّتِي المُفَضَّلَةُ</a:t>
@@ -33548,6 +33765,7 @@
                   <a:srgbClr val="1B3B6F"/>
                 </a:solidFill>
                 <a:latin typeface="Amiri" pitchFamily="2" charset="-78"/>
+                <a:ea typeface="Amiri" pitchFamily="2" charset="-78"/>
                 <a:cs typeface="Amiri" pitchFamily="2" charset="-78"/>
               </a:rPr>
               <a:t>مَوَادُّ</a:t>
@@ -33813,6 +34031,7 @@
                   <a:srgbClr val="1B3B6F"/>
                 </a:solidFill>
                 <a:latin typeface="Amiri" pitchFamily="2" charset="-78"/>
+                <a:ea typeface="Amiri" pitchFamily="2" charset="-78"/>
                 <a:cs typeface="Amiri" pitchFamily="2" charset="-78"/>
               </a:rPr>
               <a:t>الرِّيَاضِيَّاتُ · العُلُومُ</a:t>
@@ -33970,6 +34189,7 @@
                   <a:srgbClr val="1B3B6F"/>
                 </a:solidFill>
                 <a:latin typeface="Amiri" pitchFamily="2" charset="-78"/>
+                <a:ea typeface="Amiri" pitchFamily="2" charset="-78"/>
                 <a:cs typeface="Amiri" pitchFamily="2" charset="-78"/>
               </a:rPr>
               <a:t>الفِيزْيَاءُ · الكِيمْيَاءُ · الأَحْيَاءُ</a:t>
@@ -34235,6 +34455,7 @@
                   <a:srgbClr val="1B3B6F"/>
                 </a:solidFill>
                 <a:latin typeface="Amiri" pitchFamily="2" charset="-78"/>
+                <a:ea typeface="Amiri" pitchFamily="2" charset="-78"/>
                 <a:cs typeface="Amiri" pitchFamily="2" charset="-78"/>
               </a:rPr>
               <a:t>التَّارِيخُ · الجُغْرَافْيَا</a:t>
@@ -34392,6 +34613,7 @@
                   <a:srgbClr val="1B3B6F"/>
                 </a:solidFill>
                 <a:latin typeface="Amiri" pitchFamily="2" charset="-78"/>
+                <a:ea typeface="Amiri" pitchFamily="2" charset="-78"/>
                 <a:cs typeface="Amiri" pitchFamily="2" charset="-78"/>
               </a:rPr>
               <a:t>الفَنُّ · المُوسِيقَى</a:t>
@@ -34657,6 +34879,7 @@
                   <a:srgbClr val="1B3B6F"/>
                 </a:solidFill>
                 <a:latin typeface="Amiri" pitchFamily="2" charset="-78"/>
+                <a:ea typeface="Amiri" pitchFamily="2" charset="-78"/>
                 <a:cs typeface="Amiri" pitchFamily="2" charset="-78"/>
               </a:rPr>
               <a:t>اللُّغَةُ العَرَبِيَّةُ</a:t>
@@ -34814,6 +35037,7 @@
                   <a:srgbClr val="1B3B6F"/>
                 </a:solidFill>
                 <a:latin typeface="Amiri" pitchFamily="2" charset="-78"/>
+                <a:ea typeface="Amiri" pitchFamily="2" charset="-78"/>
                 <a:cs typeface="Amiri" pitchFamily="2" charset="-78"/>
               </a:rPr>
               <a:t>الفَرَنْسِيَّةُ</a:t>
@@ -34917,6 +35141,7 @@
                   <a:srgbClr val="1B3B6F"/>
                 </a:solidFill>
                 <a:latin typeface="Amiri" pitchFamily="2" charset="-78"/>
+                <a:ea typeface="Amiri" pitchFamily="2" charset="-78"/>
                 <a:cs typeface="Amiri" pitchFamily="2" charset="-78"/>
               </a:rPr>
               <a:t>اللُّغَةُ الإِنْجْلِيزِيَّةُ</a:t>
@@ -35182,6 +35407,7 @@
                   <a:srgbClr val="1B3B6F"/>
                 </a:solidFill>
                 <a:latin typeface="Amiri" pitchFamily="2" charset="-78"/>
+                <a:ea typeface="Amiri" pitchFamily="2" charset="-78"/>
                 <a:cs typeface="Amiri" pitchFamily="2" charset="-78"/>
               </a:rPr>
               <a:t>التَّرْبِيَةُ البَدَنِيَّةُ</a:t>
@@ -35339,6 +35565,7 @@
                   <a:srgbClr val="1B3B6F"/>
                 </a:solidFill>
                 <a:latin typeface="Amiri" pitchFamily="2" charset="-78"/>
+                <a:ea typeface="Amiri" pitchFamily="2" charset="-78"/>
                 <a:cs typeface="Amiri" pitchFamily="2" charset="-78"/>
               </a:rPr>
               <a:t>الحَاسُوبُ</a:t>
@@ -35442,6 +35669,7 @@
                   <a:srgbClr val="1B3B6F"/>
                 </a:solidFill>
                 <a:latin typeface="Amiri" pitchFamily="2" charset="-78"/>
+                <a:ea typeface="Amiri" pitchFamily="2" charset="-78"/>
                 <a:cs typeface="Amiri" pitchFamily="2" charset="-78"/>
               </a:rPr>
               <a:t>التَّرْبِيَةُ الإِسْلَامِيَّةُ</a:t>
@@ -35707,6 +35935,7 @@
                   <a:srgbClr val="1B3B6F"/>
                 </a:solidFill>
                 <a:latin typeface="Amiri" pitchFamily="2" charset="-78"/>
+                <a:ea typeface="Amiri" pitchFamily="2" charset="-78"/>
                 <a:cs typeface="Amiri" pitchFamily="2" charset="-78"/>
               </a:rPr>
               <a:t>حِصَّةٌ</a:t>
@@ -35864,6 +36093,7 @@
                   <a:srgbClr val="1B3B6F"/>
                 </a:solidFill>
                 <a:latin typeface="Amiri" pitchFamily="2" charset="-78"/>
+                <a:ea typeface="Amiri" pitchFamily="2" charset="-78"/>
                 <a:cs typeface="Amiri" pitchFamily="2" charset="-78"/>
               </a:rPr>
               <a:t>الحِصَّةُ الأُولَى</a:t>
@@ -35967,6 +36197,7 @@
                   <a:srgbClr val="1B3B6F"/>
                 </a:solidFill>
                 <a:latin typeface="Amiri" pitchFamily="2" charset="-78"/>
+                <a:ea typeface="Amiri" pitchFamily="2" charset="-78"/>
                 <a:cs typeface="Amiri" pitchFamily="2" charset="-78"/>
               </a:rPr>
               <a:t>حِصَصٌ</a:t>
@@ -36100,6 +36331,7 @@
                   <a:srgbClr val="D4AF37"/>
                 </a:solidFill>
                 <a:latin typeface="Amiri" pitchFamily="2" charset="-78"/>
+                <a:ea typeface="Amiri" pitchFamily="2" charset="-78"/>
                 <a:cs typeface="Amiri" pitchFamily="2" charset="-78"/>
               </a:rPr>
               <a:t>م</a:t>
@@ -36420,6 +36652,7 @@
                   <a:srgbClr val="8A6D1E"/>
                 </a:solidFill>
                 <a:latin typeface="Amiri" pitchFamily="2" charset="-78"/>
+                <a:ea typeface="Amiri" pitchFamily="2" charset="-78"/>
                 <a:cs typeface="Amiri" pitchFamily="2" charset="-78"/>
               </a:rPr>
               <a:t>الوَقْتُ وَالتَّفْضِيلُ</a:t>
@@ -36723,6 +36956,7 @@
                   <a:srgbClr val="1B3B6F"/>
                 </a:solidFill>
                 <a:latin typeface="Amiri" pitchFamily="2" charset="-78"/>
+                <a:ea typeface="Amiri" pitchFamily="2" charset="-78"/>
                 <a:cs typeface="Amiri" pitchFamily="2" charset="-78"/>
               </a:rPr>
               <a:t>جَدْوَلٌ دِرَاسِيٌّ</a:t>
@@ -36880,6 +37114,7 @@
                   <a:srgbClr val="1B3B6F"/>
                 </a:solidFill>
                 <a:latin typeface="Amiri" pitchFamily="2" charset="-78"/>
+                <a:ea typeface="Amiri" pitchFamily="2" charset="-78"/>
                 <a:cs typeface="Amiri" pitchFamily="2" charset="-78"/>
               </a:rPr>
               <a:t>الاسْتِرَاحَةُ</a:t>
@@ -36983,6 +37218,7 @@
                   <a:srgbClr val="1B3B6F"/>
                 </a:solidFill>
                 <a:latin typeface="Amiri" pitchFamily="2" charset="-78"/>
+                <a:ea typeface="Amiri" pitchFamily="2" charset="-78"/>
                 <a:cs typeface="Amiri" pitchFamily="2" charset="-78"/>
               </a:rPr>
               <a:t>جَدَاوِلُ دِرَاسِيَّةٌ</a:t>
@@ -37248,6 +37484,7 @@
                   <a:srgbClr val="1B3B6F"/>
                 </a:solidFill>
                 <a:latin typeface="Amiri" pitchFamily="2" charset="-78"/>
+                <a:ea typeface="Amiri" pitchFamily="2" charset="-78"/>
                 <a:cs typeface="Amiri" pitchFamily="2" charset="-78"/>
               </a:rPr>
               <a:t>فِي السَّاعَةِ …</a:t>
@@ -37405,6 +37642,7 @@
                   <a:srgbClr val="1B3B6F"/>
                 </a:solidFill>
                 <a:latin typeface="Amiri" pitchFamily="2" charset="-78"/>
+                <a:ea typeface="Amiri" pitchFamily="2" charset="-78"/>
                 <a:cs typeface="Amiri" pitchFamily="2" charset="-78"/>
               </a:rPr>
               <a:t>الرَّابِعَةِ إِلَّا رُبْعًا</a:t>
@@ -37508,6 +37746,7 @@
                   <a:srgbClr val="1B3B6F"/>
                 </a:solidFill>
                 <a:latin typeface="Amiri" pitchFamily="2" charset="-78"/>
+                <a:ea typeface="Amiri" pitchFamily="2" charset="-78"/>
                 <a:cs typeface="Amiri" pitchFamily="2" charset="-78"/>
               </a:rPr>
               <a:t>التَّاسِعَةِ وَالرُّبْعِ</a:t>
@@ -37611,6 +37850,7 @@
                   <a:srgbClr val="1B3B6F"/>
                 </a:solidFill>
                 <a:latin typeface="Amiri" pitchFamily="2" charset="-78"/>
+                <a:ea typeface="Amiri" pitchFamily="2" charset="-78"/>
                 <a:cs typeface="Amiri" pitchFamily="2" charset="-78"/>
               </a:rPr>
               <a:t>الثَّامِنَةِ وَالنِّصْفِ</a:t>
@@ -37876,6 +38116,7 @@
                   <a:srgbClr val="1B3B6F"/>
                 </a:solidFill>
                 <a:latin typeface="Amiri" pitchFamily="2" charset="-78"/>
+                <a:ea typeface="Amiri" pitchFamily="2" charset="-78"/>
                 <a:cs typeface="Amiri" pitchFamily="2" charset="-78"/>
               </a:rPr>
               <a:t>سَهْلٌ · صَعْبٌ</a:t>
@@ -38033,6 +38274,7 @@
                   <a:srgbClr val="1B3B6F"/>
                 </a:solidFill>
                 <a:latin typeface="Amiri" pitchFamily="2" charset="-78"/>
+                <a:ea typeface="Amiri" pitchFamily="2" charset="-78"/>
                 <a:cs typeface="Amiri" pitchFamily="2" charset="-78"/>
               </a:rPr>
               <a:t>أَسْهَلُ · أَصْعَبُ</a:t>
@@ -38136,6 +38378,7 @@
                   <a:srgbClr val="1B3B6F"/>
                 </a:solidFill>
                 <a:latin typeface="Amiri" pitchFamily="2" charset="-78"/>
+                <a:ea typeface="Amiri" pitchFamily="2" charset="-78"/>
                 <a:cs typeface="Amiri" pitchFamily="2" charset="-78"/>
               </a:rPr>
               <a:t>سَهْلَةٌ · صَعْبَةٌ</a:t>
@@ -38401,6 +38644,7 @@
                   <a:srgbClr val="1B3B6F"/>
                 </a:solidFill>
                 <a:latin typeface="Amiri" pitchFamily="2" charset="-78"/>
+                <a:ea typeface="Amiri" pitchFamily="2" charset="-78"/>
                 <a:cs typeface="Amiri" pitchFamily="2" charset="-78"/>
               </a:rPr>
               <a:t>مُفِيدٌ · مُمِلٌّ</a:t>
@@ -38558,6 +38802,7 @@
                   <a:srgbClr val="1B3B6F"/>
                 </a:solidFill>
                 <a:latin typeface="Amiri" pitchFamily="2" charset="-78"/>
+                <a:ea typeface="Amiri" pitchFamily="2" charset="-78"/>
                 <a:cs typeface="Amiri" pitchFamily="2" charset="-78"/>
               </a:rPr>
               <a:t>أَكْثَرُ فَائِدَةً</a:t>
@@ -38661,6 +38906,7 @@
                   <a:srgbClr val="1B3B6F"/>
                 </a:solidFill>
                 <a:latin typeface="Amiri" pitchFamily="2" charset="-78"/>
+                <a:ea typeface="Amiri" pitchFamily="2" charset="-78"/>
                 <a:cs typeface="Amiri" pitchFamily="2" charset="-78"/>
               </a:rPr>
               <a:t>مُفِيدَةٌ · مُمِلَّةٌ</a:t>
@@ -38926,6 +39172,7 @@
                   <a:srgbClr val="1B3B6F"/>
                 </a:solidFill>
                 <a:latin typeface="Amiri" pitchFamily="2" charset="-78"/>
+                <a:ea typeface="Amiri" pitchFamily="2" charset="-78"/>
                 <a:cs typeface="Amiri" pitchFamily="2" charset="-78"/>
               </a:rPr>
               <a:t>أُفَضِّلُ … عَلَى …</a:t>
@@ -39083,6 +39330,7 @@
                   <a:srgbClr val="1B3B6F"/>
                 </a:solidFill>
                 <a:latin typeface="Amiri" pitchFamily="2" charset="-78"/>
+                <a:ea typeface="Amiri" pitchFamily="2" charset="-78"/>
                 <a:cs typeface="Amiri" pitchFamily="2" charset="-78"/>
               </a:rPr>
               <a:t>تَفْضِيلٌ</a:t>
@@ -39186,6 +39434,7 @@
                   <a:srgbClr val="1B3B6F"/>
                 </a:solidFill>
                 <a:latin typeface="Amiri" pitchFamily="2" charset="-78"/>
+                <a:ea typeface="Amiri" pitchFamily="2" charset="-78"/>
                 <a:cs typeface="Amiri" pitchFamily="2" charset="-78"/>
               </a:rPr>
               <a:t>يُفَضِّلُ · تُفَضِّلُ</a:t>
@@ -39451,6 +39700,7 @@
                   <a:srgbClr val="1B3B6F"/>
                 </a:solidFill>
                 <a:latin typeface="Amiri" pitchFamily="2" charset="-78"/>
+                <a:ea typeface="Amiri" pitchFamily="2" charset="-78"/>
                 <a:cs typeface="Amiri" pitchFamily="2" charset="-78"/>
               </a:rPr>
               <a:t>لِأَنَّ · لٰكِنَّ · بَيْنَمَا</a:t>
@@ -39608,6 +39858,7 @@
                   <a:srgbClr val="1B3B6F"/>
                 </a:solidFill>
                 <a:latin typeface="Amiri" pitchFamily="2" charset="-78"/>
+                <a:ea typeface="Amiri" pitchFamily="2" charset="-78"/>
                 <a:cs typeface="Amiri" pitchFamily="2" charset="-78"/>
               </a:rPr>
               <a:t>لٰكِنَّهَا</a:t>
@@ -39711,6 +39962,7 @@
                   <a:srgbClr val="1B3B6F"/>
                 </a:solidFill>
                 <a:latin typeface="Amiri" pitchFamily="2" charset="-78"/>
+                <a:ea typeface="Amiri" pitchFamily="2" charset="-78"/>
                 <a:cs typeface="Amiri" pitchFamily="2" charset="-78"/>
               </a:rPr>
               <a:t>لِأَنَّهَا</a:t>
@@ -39844,6 +40096,7 @@
                   <a:srgbClr val="D4AF37"/>
                 </a:solidFill>
                 <a:latin typeface="Amiri" pitchFamily="2" charset="-78"/>
+                <a:ea typeface="Amiri" pitchFamily="2" charset="-78"/>
                 <a:cs typeface="Amiri" pitchFamily="2" charset="-78"/>
               </a:rPr>
               <a:t>م</a:t>
@@ -40164,6 +40417,7 @@
                   <a:srgbClr val="8A6D1E"/>
                 </a:solidFill>
                 <a:latin typeface="Amiri" pitchFamily="2" charset="-78"/>
+                <a:ea typeface="Amiri" pitchFamily="2" charset="-78"/>
                 <a:cs typeface="Amiri" pitchFamily="2" charset="-78"/>
               </a:rPr>
               <a:t>فِي الغُرَفِ</a:t>
@@ -41340,6 +41594,7 @@
                   <a:srgbClr val="1B3B6F"/>
                 </a:solidFill>
                 <a:latin typeface="Amiri" pitchFamily="2" charset="-78"/>
+                <a:ea typeface="Amiri" pitchFamily="2" charset="-78"/>
                 <a:cs typeface="Amiri" pitchFamily="2" charset="-78"/>
               </a:rPr>
               <a:t>دَوْرُكَ!</a:t>
@@ -41416,6 +41671,7 @@
                   <a:srgbClr val="1B3B6F"/>
                 </a:solidFill>
                 <a:latin typeface="Amiri" pitchFamily="2" charset="-78"/>
+                <a:ea typeface="Amiri" pitchFamily="2" charset="-78"/>
                 <a:cs typeface="Amiri" pitchFamily="2" charset="-78"/>
               </a:rPr>
               <a:t>أَحْسَنْتَ! / أَحْسَنْتِ!</a:t>
@@ -41492,6 +41748,7 @@
                   <a:srgbClr val="1B3B6F"/>
                 </a:solidFill>
                 <a:latin typeface="Amiri" pitchFamily="2" charset="-78"/>
+                <a:ea typeface="Amiri" pitchFamily="2" charset="-78"/>
                 <a:cs typeface="Amiri" pitchFamily="2" charset="-78"/>
               </a:rPr>
               <a:t>تَكَلَّمْ أَكْثَرَ، مِنْ فَضْلِكَ</a:t>
@@ -41568,6 +41825,7 @@
                   <a:srgbClr val="1B3B6F"/>
                 </a:solidFill>
                 <a:latin typeface="Amiri" pitchFamily="2" charset="-78"/>
+                <a:ea typeface="Amiri" pitchFamily="2" charset="-78"/>
                 <a:cs typeface="Amiri" pitchFamily="2" charset="-78"/>
               </a:rPr>
               <a:t>لِمَاذَا؟</a:t>
@@ -41739,6 +41997,7 @@
                   <a:srgbClr val="D4AF37"/>
                 </a:solidFill>
                 <a:latin typeface="Amiri" pitchFamily="2" charset="-78"/>
+                <a:ea typeface="Amiri" pitchFamily="2" charset="-78"/>
                 <a:cs typeface="Amiri" pitchFamily="2" charset="-78"/>
               </a:rPr>
               <a:t>م</a:t>
@@ -42059,6 +42318,7 @@
                   <a:srgbClr val="8A6D1E"/>
                 </a:solidFill>
                 <a:latin typeface="Amiri" pitchFamily="2" charset="-78"/>
+                <a:ea typeface="Amiri" pitchFamily="2" charset="-78"/>
                 <a:cs typeface="Amiri" pitchFamily="2" charset="-78"/>
               </a:rPr>
               <a:t>جَدْوَلُ اليَوْمِ</a:t>
@@ -42339,6 +42599,7 @@
                   <a:srgbClr val="1B3B6F"/>
                 </a:solidFill>
                 <a:latin typeface="Amiri" pitchFamily="2" charset="-78"/>
+                <a:ea typeface="Amiri" pitchFamily="2" charset="-78"/>
                 <a:cs typeface="Amiri" pitchFamily="2" charset="-78"/>
               </a:rPr>
               <a:t>الحِصَّةُ الأُولَى …</a:t>
@@ -42415,6 +42676,7 @@
                   <a:srgbClr val="1B3B6F"/>
                 </a:solidFill>
                 <a:latin typeface="Amiri" pitchFamily="2" charset="-78"/>
+                <a:ea typeface="Amiri" pitchFamily="2" charset="-78"/>
                 <a:cs typeface="Amiri" pitchFamily="2" charset="-78"/>
               </a:rPr>
               <a:t>مَا الحِصَّةُ الأُولَى اليَوْمَ؟</a:t>
@@ -42583,6 +42845,7 @@
                   <a:srgbClr val="1B3B6F"/>
                 </a:solidFill>
                 <a:latin typeface="Amiri" pitchFamily="2" charset="-78"/>
+                <a:ea typeface="Amiri" pitchFamily="2" charset="-78"/>
                 <a:cs typeface="Amiri" pitchFamily="2" charset="-78"/>
               </a:rPr>
               <a:t>تَبْدَأُ فِي السَّاعَةِ …</a:t>
@@ -42659,6 +42922,7 @@
                   <a:srgbClr val="1B3B6F"/>
                 </a:solidFill>
                 <a:latin typeface="Amiri" pitchFamily="2" charset="-78"/>
+                <a:ea typeface="Amiri" pitchFamily="2" charset="-78"/>
                 <a:cs typeface="Amiri" pitchFamily="2" charset="-78"/>
               </a:rPr>
               <a:t>مَتَى تَبْدَأُ؟</a:t>
@@ -42827,6 +43091,7 @@
                   <a:srgbClr val="1B3B6F"/>
                 </a:solidFill>
                 <a:latin typeface="Amiri" pitchFamily="2" charset="-78"/>
+                <a:ea typeface="Amiri" pitchFamily="2" charset="-78"/>
                 <a:cs typeface="Amiri" pitchFamily="2" charset="-78"/>
               </a:rPr>
               <a:t>الاسْتِرَاحَةُ فِي …</a:t>
@@ -42903,6 +43168,7 @@
                   <a:srgbClr val="1B3B6F"/>
                 </a:solidFill>
                 <a:latin typeface="Amiri" pitchFamily="2" charset="-78"/>
+                <a:ea typeface="Amiri" pitchFamily="2" charset="-78"/>
                 <a:cs typeface="Amiri" pitchFamily="2" charset="-78"/>
               </a:rPr>
               <a:t>وَمَتَى الاسْتِرَاحَةُ؟</a:t>
@@ -43071,6 +43337,7 @@
                   <a:srgbClr val="1B3B6F"/>
                 </a:solidFill>
                 <a:latin typeface="Amiri" pitchFamily="2" charset="-78"/>
+                <a:ea typeface="Amiri" pitchFamily="2" charset="-78"/>
                 <a:cs typeface="Amiri" pitchFamily="2" charset="-78"/>
               </a:rPr>
               <a:t>أُحِبُّ … لِأَنَّهَا …</a:t>
@@ -43147,6 +43414,7 @@
                   <a:srgbClr val="1B3B6F"/>
                 </a:solidFill>
                 <a:latin typeface="Amiri" pitchFamily="2" charset="-78"/>
+                <a:ea typeface="Amiri" pitchFamily="2" charset="-78"/>
                 <a:cs typeface="Amiri" pitchFamily="2" charset="-78"/>
               </a:rPr>
               <a:t>عِنْدَنَا عُلُومٌ بَعْدَ الاسْتِرَاحَةِ.</a:t>
@@ -43315,6 +43583,7 @@
                   <a:srgbClr val="1B3B6F"/>
                 </a:solidFill>
                 <a:latin typeface="Amiri" pitchFamily="2" charset="-78"/>
+                <a:ea typeface="Amiri" pitchFamily="2" charset="-78"/>
                 <a:cs typeface="Amiri" pitchFamily="2" charset="-78"/>
               </a:rPr>
               <a:t>يَنْتَهِي فِي …</a:t>
@@ -43391,6 +43660,7 @@
                   <a:srgbClr val="1B3B6F"/>
                 </a:solidFill>
                 <a:latin typeface="Amiri" pitchFamily="2" charset="-78"/>
+                <a:ea typeface="Amiri" pitchFamily="2" charset="-78"/>
                 <a:cs typeface="Amiri" pitchFamily="2" charset="-78"/>
               </a:rPr>
               <a:t>مَتَى يَنْتَهِي اليَوْمُ الدِّرَاسِيُّ؟</a:t>
@@ -43665,6 +43935,7 @@
                   <a:srgbClr val="D4AF37"/>
                 </a:solidFill>
                 <a:latin typeface="Amiri" pitchFamily="2" charset="-78"/>
+                <a:ea typeface="Amiri" pitchFamily="2" charset="-78"/>
                 <a:cs typeface="Amiri" pitchFamily="2" charset="-78"/>
               </a:rPr>
               <a:t>م</a:t>
@@ -43985,6 +44256,7 @@
                   <a:srgbClr val="8A6D1E"/>
                 </a:solidFill>
                 <a:latin typeface="Amiri" pitchFamily="2" charset="-78"/>
+                <a:ea typeface="Amiri" pitchFamily="2" charset="-78"/>
                 <a:cs typeface="Amiri" pitchFamily="2" charset="-78"/>
               </a:rPr>
               <a:t>اخْتِيَارُ المَوَادِّ</a:t>
@@ -44265,6 +44537,7 @@
                   <a:srgbClr val="1B3B6F"/>
                 </a:solidFill>
                 <a:latin typeface="Amiri" pitchFamily="2" charset="-78"/>
+                <a:ea typeface="Amiri" pitchFamily="2" charset="-78"/>
                 <a:cs typeface="Amiri" pitchFamily="2" charset="-78"/>
               </a:rPr>
               <a:t>أُرِيدُ أَنْ أَخْتَارَ … وَ…</a:t>
@@ -44341,6 +44614,7 @@
                   <a:srgbClr val="1B3B6F"/>
                 </a:solidFill>
                 <a:latin typeface="Amiri" pitchFamily="2" charset="-78"/>
+                <a:ea typeface="Amiri" pitchFamily="2" charset="-78"/>
                 <a:cs typeface="Amiri" pitchFamily="2" charset="-78"/>
               </a:rPr>
               <a:t>أَيَّ مَوَادَّ تُرِيدُ أَنْ تَخْتَارَ؟</a:t>
@@ -44509,6 +44783,7 @@
                   <a:srgbClr val="1B3B6F"/>
                 </a:solidFill>
                 <a:latin typeface="Amiri" pitchFamily="2" charset="-78"/>
+                <a:ea typeface="Amiri" pitchFamily="2" charset="-78"/>
                 <a:cs typeface="Amiri" pitchFamily="2" charset="-78"/>
               </a:rPr>
               <a:t>لِأَنَّهُ …</a:t>
@@ -44585,6 +44860,7 @@
                   <a:srgbClr val="1B3B6F"/>
                 </a:solidFill>
                 <a:latin typeface="Amiri" pitchFamily="2" charset="-78"/>
+                <a:ea typeface="Amiri" pitchFamily="2" charset="-78"/>
                 <a:cs typeface="Amiri" pitchFamily="2" charset="-78"/>
               </a:rPr>
               <a:t>لِمَاذَا التَّارِيخُ؟</a:t>
@@ -44753,6 +45029,7 @@
                   <a:srgbClr val="1B3B6F"/>
                 </a:solidFill>
                 <a:latin typeface="Amiri" pitchFamily="2" charset="-78"/>
+                <a:ea typeface="Amiri" pitchFamily="2" charset="-78"/>
                 <a:cs typeface="Amiri" pitchFamily="2" charset="-78"/>
               </a:rPr>
               <a:t>أُفَضِّلُ … عَلَى … لِأَنَّ … لٰكِنَّ …</a:t>
@@ -44829,6 +45106,7 @@
                   <a:srgbClr val="1B3B6F"/>
                 </a:solidFill>
                 <a:latin typeface="Amiri" pitchFamily="2" charset="-78"/>
+                <a:ea typeface="Amiri" pitchFamily="2" charset="-78"/>
                 <a:cs typeface="Amiri" pitchFamily="2" charset="-78"/>
               </a:rPr>
               <a:t>وَالجُغْرَافْيَا؟ دَرَجَاتُكَ فِيهَا جَيِّدَةٌ.</a:t>
@@ -44932,6 +45210,7 @@
                   <a:srgbClr val="1B3B6F"/>
                 </a:solidFill>
                 <a:latin typeface="Amiri" pitchFamily="2" charset="-78"/>
+                <a:ea typeface="Amiri" pitchFamily="2" charset="-78"/>
                 <a:cs typeface="Amiri" pitchFamily="2" charset="-78"/>
               </a:rPr>
               <a:t>كَمْ حِصَّةً …؟</a:t>
@@ -45008,6 +45287,7 @@
                   <a:srgbClr val="1B3B6F"/>
                 </a:solidFill>
                 <a:latin typeface="Amiri" pitchFamily="2" charset="-78"/>
+                <a:ea typeface="Amiri" pitchFamily="2" charset="-78"/>
                 <a:cs typeface="Amiri" pitchFamily="2" charset="-78"/>
               </a:rPr>
               <a:t>تَذَكَّرْ: العَرَبِيَّةُ تَحْتَاجُ إِلَى وَقْتٍ كَثِيرٍ.</a:t>
@@ -45111,6 +45391,7 @@
                   <a:srgbClr val="1B3B6F"/>
                 </a:solidFill>
                 <a:latin typeface="Amiri" pitchFamily="2" charset="-78"/>
+                <a:ea typeface="Amiri" pitchFamily="2" charset="-78"/>
                 <a:cs typeface="Amiri" pitchFamily="2" charset="-78"/>
               </a:rPr>
               <a:t>لَنْ أَخْتَارَ … لِأَنَّهَا …</a:t>
@@ -45187,6 +45468,7 @@
                   <a:srgbClr val="1B3B6F"/>
                 </a:solidFill>
                 <a:latin typeface="Amiri" pitchFamily="2" charset="-78"/>
+                <a:ea typeface="Amiri" pitchFamily="2" charset="-78"/>
                 <a:cs typeface="Amiri" pitchFamily="2" charset="-78"/>
               </a:rPr>
               <a:t>مَا المَادَّةُ الَّتِي لَنْ تَخْتَارَهَا؟</a:t>
@@ -45361,13 +45643,9 @@
     <a:fontScheme name="Office">
       <a:majorFont>
         <a:latin typeface="Calibri Light" panose="020F0302020204030204"/>
-        <a:ea typeface=""/>
-        <a:cs typeface=""/>
-        <a:font script="Jpan" typeface="游ゴシック Light"/>
-        <a:font script="Hang" typeface="맑은 고딕"/>
-        <a:font script="Hans" typeface="等线 Light"/>
-        <a:font script="Hant" typeface="新細明體"/>
-        <a:font script="Arab" typeface="Times New Roman"/>
+        <a:ea typeface="Amiri" pitchFamily="2" charset="-78"/>
+        <a:cs typeface="Amiri" pitchFamily="2" charset="-78"/>
+        <a:font script="Arab" typeface="Amiri"/>
         <a:font script="Hebr" typeface="Times New Roman"/>
         <a:font script="Thai" typeface="Angsana New"/>
         <a:font script="Ethi" typeface="Nyala"/>
@@ -45413,13 +45691,9 @@
       </a:majorFont>
       <a:minorFont>
         <a:latin typeface="Calibri" panose="020F0502020204030204"/>
-        <a:ea typeface=""/>
-        <a:cs typeface=""/>
-        <a:font script="Jpan" typeface="游ゴシック"/>
-        <a:font script="Hang" typeface="맑은 고딕"/>
-        <a:font script="Hans" typeface="等线"/>
-        <a:font script="Hant" typeface="新細明體"/>
-        <a:font script="Arab" typeface="Arial"/>
+        <a:ea typeface="Amiri" pitchFamily="2" charset="-78"/>
+        <a:cs typeface="Amiri" pitchFamily="2" charset="-78"/>
+        <a:font script="Arab" typeface="Amiri"/>
         <a:font script="Hebr" typeface="Arial"/>
         <a:font script="Thai" typeface="Cordia New"/>
         <a:font script="Ethi" typeface="Nyala"/>
